--- a/MedRisk-ADH/data/reports/medrisk_adh_deck.pptx
+++ b/MedRisk-ADH/data/reports/medrisk_adh_deck.pptx
@@ -15,10 +15,6 @@
     <p:sldId id="263" r:id="rId14"/>
     <p:sldId id="264" r:id="rId15"/>
     <p:sldId id="265" r:id="rId16"/>
-    <p:sldId id="266" r:id="rId17"/>
-    <p:sldId id="267" r:id="rId18"/>
-    <p:sldId id="268" r:id="rId19"/>
-    <p:sldId id="269" r:id="rId20"/>
   </p:sldIdLst>
   <p:sldSz cx="12191695" cy="6858000" type="screen4x3"/>
   <p:notesSz cx="6858000" cy="9144000"/>
@@ -3117,8 +3113,8 @@
         </p:nvSpPr>
         <p:spPr>
           <a:xfrm>
-            <a:off x="1371600" y="1645920"/>
-            <a:ext cx="9144000" cy="1097280"/>
+            <a:off x="1371600" y="1828800"/>
+            <a:ext cx="9144000" cy="914400"/>
           </a:xfrm>
           <a:prstGeom prst="rect">
             <a:avLst/>
@@ -3139,7 +3135,7 @@
               </a:defRPr>
             </a:pPr>
             <a:r>
-              <a:t>MedRisk-ADH</a:t>
+              <a:t>Tim Reska</a:t>
             </a:r>
           </a:p>
         </p:txBody>
@@ -3152,7 +3148,7 @@
         </p:nvSpPr>
         <p:spPr>
           <a:xfrm>
-            <a:off x="1371600" y="2743200"/>
+            <a:off x="1371600" y="2926080"/>
             <a:ext cx="9144000" cy="731520"/>
           </a:xfrm>
           <a:prstGeom prst="rect">
@@ -3167,14 +3163,14 @@
           <a:lstStyle/>
           <a:p>
             <a:pPr algn="ctr">
-              <a:defRPr sz="1800" b="0">
+              <a:defRPr sz="2200" b="0">
                 <a:solidFill>
                   <a:srgbClr val="107ACA"/>
                 </a:solidFill>
               </a:defRPr>
             </a:pPr>
             <a:r>
-              <a:t>AI-Augmented Medical Underwriting with Confidence-Calibrated Failure Mode Detection</a:t>
+              <a:t>AI-Augmented Medical Underwriting</a:t>
             </a:r>
           </a:p>
         </p:txBody>
@@ -3187,7 +3183,7 @@
         </p:nvSpPr>
         <p:spPr>
           <a:xfrm>
-            <a:off x="1371600" y="4114800"/>
+            <a:off x="1371600" y="3931920"/>
             <a:ext cx="9144000" cy="457200"/>
           </a:xfrm>
           <a:prstGeom prst="rect">
@@ -3202,14 +3198,14 @@
           <a:lstStyle/>
           <a:p>
             <a:pPr algn="ctr">
-              <a:defRPr sz="1200" b="0">
-                <a:solidFill>
-                  <a:srgbClr val="61788E"/>
-                </a:solidFill>
-              </a:defRPr>
-            </a:pPr>
-            <a:r>
-              <a:t>v2.0 | Proof of Concept | All data is synthetic</a:t>
+              <a:defRPr sz="1400" b="0">
+                <a:solidFill>
+                  <a:srgbClr val="2B4660"/>
+                </a:solidFill>
+              </a:defRPr>
+            </a:pPr>
+            <a:r>
+              <a:t>What I built in 48 hours with Claude to show you what's possible</a:t>
             </a:r>
           </a:p>
         </p:txBody>
@@ -3237,14 +3233,14 @@
           <a:lstStyle/>
           <a:p>
             <a:pPr algn="ctr">
-              <a:defRPr sz="1400" b="0">
-                <a:solidFill>
-                  <a:srgbClr val="2B4660"/>
-                </a:solidFill>
-              </a:defRPr>
-            </a:pPr>
-            <a:r>
-              <a:t>Tim Reska | Helmholtz Munich | March 2026</a:t>
+              <a:defRPr sz="1200" b="0">
+                <a:solidFill>
+                  <a:srgbClr val="61788E"/>
+                </a:solidFill>
+              </a:defRPr>
+            </a:pPr>
+            <a:r>
+              <a:t>PhD Helmholtz Munich  |  github.com/ttmgr  |  March 2026</a:t>
             </a:r>
           </a:p>
         </p:txBody>
@@ -3275,8 +3271,8 @@
         </p:nvSpPr>
         <p:spPr>
           <a:xfrm>
-            <a:off x="731520" y="457200"/>
-            <a:ext cx="10058400" cy="731520"/>
+            <a:off x="1371600" y="1828800"/>
+            <a:ext cx="9144000" cy="731520"/>
           </a:xfrm>
           <a:prstGeom prst="rect">
             <a:avLst/>
@@ -3289,15 +3285,15 @@
           </a:bodyPr>
           <a:lstStyle/>
           <a:p>
-            <a:pPr algn="l">
-              <a:defRPr sz="3200" b="1">
+            <a:pPr algn="ctr">
+              <a:defRPr sz="3600" b="1">
                 <a:solidFill>
                   <a:srgbClr val="0D2339"/>
                 </a:solidFill>
               </a:defRPr>
             </a:pPr>
             <a:r>
-              <a:t>Generalizable Framework</a:t>
+              <a:t>Let's build this together.</a:t>
             </a:r>
           </a:p>
         </p:txBody>
@@ -3310,8 +3306,8 @@
         </p:nvSpPr>
         <p:spPr>
           <a:xfrm>
-            <a:off x="731520" y="1371600"/>
-            <a:ext cx="10058400" cy="548640"/>
+            <a:off x="1371600" y="2926080"/>
+            <a:ext cx="9144000" cy="457200"/>
           </a:xfrm>
           <a:prstGeom prst="rect">
             <a:avLst/>
@@ -3324,15 +3320,15 @@
           </a:bodyPr>
           <a:lstStyle/>
           <a:p>
-            <a:pPr algn="l">
-              <a:defRPr sz="1600" b="0">
+            <a:pPr algn="ctr">
+              <a:defRPr sz="2200" b="0">
                 <a:solidFill>
                   <a:srgbClr val="2B4660"/>
                 </a:solidFill>
               </a:defRPr>
             </a:pPr>
             <a:r>
-              <a:t>New diseases are added as data configurations -- no code changes required.</a:t>
+              <a:t>Tim Reska</a:t>
             </a:r>
           </a:p>
         </p:txBody>
@@ -3345,8 +3341,8 @@
         </p:nvSpPr>
         <p:spPr>
           <a:xfrm>
-            <a:off x="731520" y="2286000"/>
-            <a:ext cx="5029200" cy="457200"/>
+            <a:off x="1371600" y="3566160"/>
+            <a:ext cx="9144000" cy="457200"/>
           </a:xfrm>
           <a:prstGeom prst="rect">
             <a:avLst/>
@@ -3359,75 +3355,15 @@
           </a:bodyPr>
           <a:lstStyle/>
           <a:p>
-            <a:pPr algn="l">
-              <a:defRPr sz="1800" b="1">
-                <a:solidFill>
-                  <a:srgbClr val="0D2339"/>
-                </a:solidFill>
-              </a:defRPr>
-            </a:pPr>
-            <a:r>
-              <a:t>Cardiovascular (5 states)</a:t>
-            </a:r>
-          </a:p>
-          <a:p>
-            <a:pPr>
-              <a:spcBef>
-                <a:spcPts val="400"/>
-              </a:spcBef>
-              <a:defRPr sz="1400">
-                <a:solidFill>
-                  <a:srgbClr val="2B4660"/>
-                </a:solidFill>
-              </a:defRPr>
-            </a:pPr>
-            <a:r>
-              <a:t>Healthy --&gt; Risk --&gt; Chronic --&gt; Complication --&gt; Death</a:t>
-            </a:r>
-          </a:p>
-          <a:p>
-            <a:pPr>
-              <a:spcBef>
-                <a:spcPts val="400"/>
-              </a:spcBef>
-              <a:defRPr sz="1400">
-                <a:solidFill>
-                  <a:srgbClr val="2B4660"/>
-                </a:solidFill>
-              </a:defRPr>
-            </a:pPr>
-            <a:r>
-              <a:t>10 lab values, 8 medication classes</a:t>
-            </a:r>
-          </a:p>
-          <a:p>
-            <a:pPr>
-              <a:spcBef>
-                <a:spcPts val="400"/>
-              </a:spcBef>
-              <a:defRPr sz="1400">
-                <a:solidFill>
-                  <a:srgbClr val="2B4660"/>
-                </a:solidFill>
-              </a:defRPr>
-            </a:pPr>
-            <a:r>
-              <a:t>56 ICD-10 codes across 28 categories</a:t>
-            </a:r>
-          </a:p>
-          <a:p>
-            <a:pPr>
-              <a:spcBef>
-                <a:spcPts val="400"/>
-              </a:spcBef>
-              <a:defRPr sz="1400">
-                <a:solidFill>
-                  <a:srgbClr val="2B4660"/>
-                </a:solidFill>
-              </a:defRPr>
-            </a:pPr>
-            <a:r>
-              <a:t>Charlson Comorbidity Index integration</a:t>
+            <a:pPr algn="ctr">
+              <a:defRPr sz="1400" b="0">
+                <a:solidFill>
+                  <a:srgbClr val="61788E"/>
+                </a:solidFill>
+              </a:defRPr>
+            </a:pPr>
+            <a:r>
+              <a:t>PhD Helmholtz Munich  |  8 publications  |  3 years evaluating Claude</a:t>
             </a:r>
           </a:p>
         </p:txBody>
@@ -3440,8 +3376,8 @@
         </p:nvSpPr>
         <p:spPr>
           <a:xfrm>
-            <a:off x="6217920" y="2286000"/>
-            <a:ext cx="5029200" cy="457200"/>
+            <a:off x="1371600" y="4206240"/>
+            <a:ext cx="9144000" cy="457200"/>
           </a:xfrm>
           <a:prstGeom prst="rect">
             <a:avLst/>
@@ -3454,107 +3390,29 @@
           </a:bodyPr>
           <a:lstStyle/>
           <a:p>
-            <a:pPr algn="l">
-              <a:defRPr sz="1800" b="1">
-                <a:solidFill>
-                  <a:srgbClr val="0D2339"/>
-                </a:solidFill>
-              </a:defRPr>
-            </a:pPr>
-            <a:r>
-              <a:t>Alzheimer's (7 states)</a:t>
-            </a:r>
-          </a:p>
-          <a:p>
-            <a:pPr>
-              <a:spcBef>
-                <a:spcPts val="400"/>
-              </a:spcBef>
-              <a:defRPr sz="1400">
-                <a:solidFill>
-                  <a:srgbClr val="2B4660"/>
-                </a:solidFill>
-              </a:defRPr>
-            </a:pPr>
-            <a:r>
-              <a:t>NC --&gt; SCD --&gt; MCI --&gt; Mild --&gt; Moderate --&gt; Severe --&gt; Death</a:t>
-            </a:r>
-          </a:p>
-          <a:p>
-            <a:pPr>
-              <a:spcBef>
-                <a:spcPts val="400"/>
-              </a:spcBef>
-              <a:defRPr sz="1400">
-                <a:solidFill>
-                  <a:srgbClr val="2B4660"/>
-                </a:solidFill>
-              </a:defRPr>
-            </a:pPr>
-            <a:r>
-              <a:t>MMSE, MoCA, CSF biomarkers, ApoE4 genotype</a:t>
-            </a:r>
-          </a:p>
-          <a:p>
-            <a:pPr>
-              <a:spcBef>
-                <a:spcPts val="400"/>
-              </a:spcBef>
-              <a:defRPr sz="1400">
-                <a:solidFill>
-                  <a:srgbClr val="2B4660"/>
-                </a:solidFill>
-              </a:defRPr>
-            </a:pPr>
-            <a:r>
-              <a:t>8 ICD-10 codes (G30.x, F00.x), 4 medications</a:t>
-            </a:r>
-          </a:p>
-          <a:p>
-            <a:pPr>
-              <a:spcBef>
-                <a:spcPts val="400"/>
-              </a:spcBef>
-              <a:defRPr sz="1400">
-                <a:solidFill>
-                  <a:srgbClr val="2B4660"/>
-                </a:solidFill>
-              </a:defRPr>
-            </a:pPr>
-            <a:r>
-              <a:t>Graduated ApoE4 risk modifier by disease stage</a:t>
-            </a:r>
-          </a:p>
-        </p:txBody>
-      </p:sp>
-    </p:spTree>
-  </p:cSld>
-  <p:clrMapOvr>
-    <a:masterClrMapping/>
-  </p:clrMapOvr>
-</p:sld>
-</file>
-
-<file path=ppt/slides/slide11.xml><?xml version="1.0" encoding="utf-8"?>
-<p:sld xmlns:a="http://schemas.openxmlformats.org/drawingml/2006/main" xmlns:p="http://schemas.openxmlformats.org/presentationml/2006/main" xmlns:r="http://schemas.openxmlformats.org/officeDocument/2006/relationships">
-  <p:cSld>
-    <p:spTree>
-      <p:nvGrpSpPr>
-        <p:cNvPr id="1" name=""/>
-        <p:cNvGrpSpPr/>
-        <p:nvPr/>
-      </p:nvGrpSpPr>
-      <p:grpSpPr/>
-      <p:sp>
-        <p:nvSpPr>
-          <p:cNvPr id="2" name="TextBox 1"/>
+            <a:pPr algn="ctr">
+              <a:defRPr sz="1300" b="0">
+                <a:solidFill>
+                  <a:srgbClr val="107ACA"/>
+                </a:solidFill>
+              </a:defRPr>
+            </a:pPr>
+            <a:r>
+              <a:t>timreska@gmail.com  |  github.com/ttmgr  |  linkedin.com/in/timreska</a:t>
+            </a:r>
+          </a:p>
+        </p:txBody>
+      </p:sp>
+      <p:sp>
+        <p:nvSpPr>
+          <p:cNvPr id="6" name="TextBox 5"/>
           <p:cNvSpPr txBox="1"/>
           <p:nvPr/>
         </p:nvSpPr>
         <p:spPr>
           <a:xfrm>
-            <a:off x="731520" y="457200"/>
-            <a:ext cx="10058400" cy="731520"/>
+            <a:off x="1371600" y="5303520"/>
+            <a:ext cx="9144000" cy="457200"/>
           </a:xfrm>
           <a:prstGeom prst="rect">
             <a:avLst/>
@@ -3567,1545 +3425,15 @@
           </a:bodyPr>
           <a:lstStyle/>
           <a:p>
-            <a:pPr algn="l">
-              <a:defRPr sz="3200" b="1">
-                <a:solidFill>
-                  <a:srgbClr val="0D2339"/>
-                </a:solidFill>
-              </a:defRPr>
-            </a:pPr>
-            <a:r>
-              <a:t>Why AI? Beyond Rule-Based Underwriting</a:t>
-            </a:r>
-          </a:p>
-        </p:txBody>
-      </p:sp>
-      <p:graphicFrame>
-        <p:nvGraphicFramePr>
-          <p:cNvPr id="3" name="Table 2"/>
-          <p:cNvGraphicFramePr>
-            <a:graphicFrameLocks noGrp="1"/>
-          </p:cNvGraphicFramePr>
-          <p:nvPr/>
-        </p:nvGraphicFramePr>
-        <p:xfrm>
-          <a:off x="731520" y="1463040"/>
-          <a:ext cx="10515600" cy="2926080"/>
-        </p:xfrm>
-        <a:graphic>
-          <a:graphicData uri="http://schemas.openxmlformats.org/drawingml/2006/table">
-            <a:tbl>
-              <a:tblPr firstRow="1" bandRow="1">
-                <a:tableStyleId>{5C22544A-7EE6-4342-B048-85BDC9FD1C3A}</a:tableStyleId>
-              </a:tblPr>
-              <a:tblGrid>
-                <a:gridCol w="2628900"/>
-                <a:gridCol w="2628900"/>
-                <a:gridCol w="2628900"/>
-                <a:gridCol w="2628900"/>
-              </a:tblGrid>
-              <a:tr h="365760">
-                <a:tc>
-                  <a:txBody>
-                    <a:bodyPr/>
-                    <a:lstStyle/>
-                    <a:p>
-                      <a:pPr algn="ctr">
-                        <a:defRPr sz="1000" b="1">
-                          <a:solidFill>
-                            <a:srgbClr val="FFFFFF"/>
-                          </a:solidFill>
-                        </a:defRPr>
-                      </a:pPr>
-                      <a:r>
-                        <a:t>Capability</a:t>
-                      </a:r>
-                    </a:p>
-                  </a:txBody>
-                  <a:tcPr>
-                    <a:solidFill>
-                      <a:srgbClr val="0D2339"/>
-                    </a:solidFill>
-                  </a:tcPr>
-                </a:tc>
-                <a:tc>
-                  <a:txBody>
-                    <a:bodyPr/>
-                    <a:lstStyle/>
-                    <a:p>
-                      <a:pPr algn="ctr">
-                        <a:defRPr sz="1000" b="1">
-                          <a:solidFill>
-                            <a:srgbClr val="FFFFFF"/>
-                          </a:solidFill>
-                        </a:defRPr>
-                      </a:pPr>
-                      <a:r>
-                        <a:t>Rules / Actuarial</a:t>
-                      </a:r>
-                    </a:p>
-                  </a:txBody>
-                  <a:tcPr>
-                    <a:solidFill>
-                      <a:srgbClr val="0D2339"/>
-                    </a:solidFill>
-                  </a:tcPr>
-                </a:tc>
-                <a:tc>
-                  <a:txBody>
-                    <a:bodyPr/>
-                    <a:lstStyle/>
-                    <a:p>
-                      <a:pPr algn="ctr">
-                        <a:defRPr sz="1000" b="1">
-                          <a:solidFill>
-                            <a:srgbClr val="FFFFFF"/>
-                          </a:solidFill>
-                        </a:defRPr>
-                      </a:pPr>
-                      <a:r>
-                        <a:t>Basic ML</a:t>
-                      </a:r>
-                    </a:p>
-                  </a:txBody>
-                  <a:tcPr>
-                    <a:solidFill>
-                      <a:srgbClr val="0D2339"/>
-                    </a:solidFill>
-                  </a:tcPr>
-                </a:tc>
-                <a:tc>
-                  <a:txBody>
-                    <a:bodyPr/>
-                    <a:lstStyle/>
-                    <a:p>
-                      <a:pPr algn="ctr">
-                        <a:defRPr sz="1000" b="1">
-                          <a:solidFill>
-                            <a:srgbClr val="FFFFFF"/>
-                          </a:solidFill>
-                        </a:defRPr>
-                      </a:pPr>
-                      <a:r>
-                        <a:t>MedRisk-ADH (AI)</a:t>
-                      </a:r>
-                    </a:p>
-                  </a:txBody>
-                  <a:tcPr>
-                    <a:solidFill>
-                      <a:srgbClr val="0D2339"/>
-                    </a:solidFill>
-                  </a:tcPr>
-                </a:tc>
-              </a:tr>
-              <a:tr h="365760">
-                <a:tc>
-                  <a:txBody>
-                    <a:bodyPr/>
-                    <a:lstStyle/>
-                    <a:p>
-                      <a:pPr algn="ctr">
-                        <a:defRPr sz="900">
-                          <a:solidFill>
-                            <a:srgbClr val="2B4660"/>
-                          </a:solidFill>
-                        </a:defRPr>
-                      </a:pPr>
-                      <a:r>
-                        <a:t>Per-case reliability</a:t>
-                      </a:r>
-                    </a:p>
-                  </a:txBody>
-                  <a:tcPr/>
-                </a:tc>
-                <a:tc>
-                  <a:txBody>
-                    <a:bodyPr/>
-                    <a:lstStyle/>
-                    <a:p>
-                      <a:pPr algn="ctr">
-                        <a:defRPr sz="900">
-                          <a:solidFill>
-                            <a:srgbClr val="2B4660"/>
-                          </a:solidFill>
-                        </a:defRPr>
-                      </a:pPr>
-                      <a:r>
-                        <a:t>No</a:t>
-                      </a:r>
-                    </a:p>
-                  </a:txBody>
-                  <a:tcPr/>
-                </a:tc>
-                <a:tc>
-                  <a:txBody>
-                    <a:bodyPr/>
-                    <a:lstStyle/>
-                    <a:p>
-                      <a:pPr algn="ctr">
-                        <a:defRPr sz="900">
-                          <a:solidFill>
-                            <a:srgbClr val="2B4660"/>
-                          </a:solidFill>
-                        </a:defRPr>
-                      </a:pPr>
-                      <a:r>
-                        <a:t>No</a:t>
-                      </a:r>
-                    </a:p>
-                  </a:txBody>
-                  <a:tcPr/>
-                </a:tc>
-                <a:tc>
-                  <a:txBody>
-                    <a:bodyPr/>
-                    <a:lstStyle/>
-                    <a:p>
-                      <a:pPr algn="ctr">
-                        <a:defRPr sz="900">
-                          <a:solidFill>
-                            <a:srgbClr val="028901"/>
-                          </a:solidFill>
-                        </a:defRPr>
-                      </a:pPr>
-                      <a:r>
-                        <a:t>Yes (DQS + P(wrong))</a:t>
-                      </a:r>
-                    </a:p>
-                  </a:txBody>
-                  <a:tcPr/>
-                </a:tc>
-              </a:tr>
-              <a:tr h="365760">
-                <a:tc>
-                  <a:txBody>
-                    <a:bodyPr/>
-                    <a:lstStyle/>
-                    <a:p>
-                      <a:pPr algn="ctr">
-                        <a:defRPr sz="900">
-                          <a:solidFill>
-                            <a:srgbClr val="2B4660"/>
-                          </a:solidFill>
-                        </a:defRPr>
-                      </a:pPr>
-                      <a:r>
-                        <a:t>Handles missing data</a:t>
-                      </a:r>
-                    </a:p>
-                  </a:txBody>
-                  <a:tcPr/>
-                </a:tc>
-                <a:tc>
-                  <a:txBody>
-                    <a:bodyPr/>
-                    <a:lstStyle/>
-                    <a:p>
-                      <a:pPr algn="ctr">
-                        <a:defRPr sz="900">
-                          <a:solidFill>
-                            <a:srgbClr val="2B4660"/>
-                          </a:solidFill>
-                        </a:defRPr>
-                      </a:pPr>
-                      <a:r>
-                        <a:t>Reject case</a:t>
-                      </a:r>
-                    </a:p>
-                  </a:txBody>
-                  <a:tcPr/>
-                </a:tc>
-                <a:tc>
-                  <a:txBody>
-                    <a:bodyPr/>
-                    <a:lstStyle/>
-                    <a:p>
-                      <a:pPr algn="ctr">
-                        <a:defRPr sz="900">
-                          <a:solidFill>
-                            <a:srgbClr val="2B4660"/>
-                          </a:solidFill>
-                        </a:defRPr>
-                      </a:pPr>
-                      <a:r>
-                        <a:t>Impute (PBW risk)</a:t>
-                      </a:r>
-                    </a:p>
-                  </a:txBody>
-                  <a:tcPr/>
-                </a:tc>
-                <a:tc>
-                  <a:txBody>
-                    <a:bodyPr/>
-                    <a:lstStyle/>
-                    <a:p>
-                      <a:pPr algn="ctr">
-                        <a:defRPr sz="900">
-                          <a:solidFill>
-                            <a:srgbClr val="028901"/>
-                          </a:solidFill>
-                        </a:defRPr>
-                      </a:pPr>
-                      <a:r>
-                        <a:t>Route to right model</a:t>
-                      </a:r>
-                    </a:p>
-                  </a:txBody>
-                  <a:tcPr/>
-                </a:tc>
-              </a:tr>
-              <a:tr h="365760">
-                <a:tc>
-                  <a:txBody>
-                    <a:bodyPr/>
-                    <a:lstStyle/>
-                    <a:p>
-                      <a:pPr algn="ctr">
-                        <a:defRPr sz="900">
-                          <a:solidFill>
-                            <a:srgbClr val="2B4660"/>
-                          </a:solidFill>
-                        </a:defRPr>
-                      </a:pPr>
-                      <a:r>
-                        <a:t>Individual risk drivers</a:t>
-                      </a:r>
-                    </a:p>
-                  </a:txBody>
-                  <a:tcPr/>
-                </a:tc>
-                <a:tc>
-                  <a:txBody>
-                    <a:bodyPr/>
-                    <a:lstStyle/>
-                    <a:p>
-                      <a:pPr algn="ctr">
-                        <a:defRPr sz="900">
-                          <a:solidFill>
-                            <a:srgbClr val="2B4660"/>
-                          </a:solidFill>
-                        </a:defRPr>
-                      </a:pPr>
-                      <a:r>
-                        <a:t>No</a:t>
-                      </a:r>
-                    </a:p>
-                  </a:txBody>
-                  <a:tcPr/>
-                </a:tc>
-                <a:tc>
-                  <a:txBody>
-                    <a:bodyPr/>
-                    <a:lstStyle/>
-                    <a:p>
-                      <a:pPr algn="ctr">
-                        <a:defRPr sz="900">
-                          <a:solidFill>
-                            <a:srgbClr val="2B4660"/>
-                          </a:solidFill>
-                        </a:defRPr>
-                      </a:pPr>
-                      <a:r>
-                        <a:t>Limited</a:t>
-                      </a:r>
-                    </a:p>
-                  </a:txBody>
-                  <a:tcPr/>
-                </a:tc>
-                <a:tc>
-                  <a:txBody>
-                    <a:bodyPr/>
-                    <a:lstStyle/>
-                    <a:p>
-                      <a:pPr algn="ctr">
-                        <a:defRPr sz="900">
-                          <a:solidFill>
-                            <a:srgbClr val="028901"/>
-                          </a:solidFill>
-                        </a:defRPr>
-                      </a:pPr>
-                      <a:r>
-                        <a:t>SHAP per patient</a:t>
-                      </a:r>
-                    </a:p>
-                  </a:txBody>
-                  <a:tcPr/>
-                </a:tc>
-              </a:tr>
-              <a:tr h="365760">
-                <a:tc>
-                  <a:txBody>
-                    <a:bodyPr/>
-                    <a:lstStyle/>
-                    <a:p>
-                      <a:pPr algn="ctr">
-                        <a:defRPr sz="900">
-                          <a:solidFill>
-                            <a:srgbClr val="2B4660"/>
-                          </a:solidFill>
-                        </a:defRPr>
-                      </a:pPr>
-                      <a:r>
-                        <a:t>Disease progression</a:t>
-                      </a:r>
-                    </a:p>
-                  </a:txBody>
-                  <a:tcPr/>
-                </a:tc>
-                <a:tc>
-                  <a:txBody>
-                    <a:bodyPr/>
-                    <a:lstStyle/>
-                    <a:p>
-                      <a:pPr algn="ctr">
-                        <a:defRPr sz="900">
-                          <a:solidFill>
-                            <a:srgbClr val="2B4660"/>
-                          </a:solidFill>
-                        </a:defRPr>
-                      </a:pPr>
-                      <a:r>
-                        <a:t>Static tables</a:t>
-                      </a:r>
-                    </a:p>
-                  </a:txBody>
-                  <a:tcPr/>
-                </a:tc>
-                <a:tc>
-                  <a:txBody>
-                    <a:bodyPr/>
-                    <a:lstStyle/>
-                    <a:p>
-                      <a:pPr algn="ctr">
-                        <a:defRPr sz="900">
-                          <a:solidFill>
-                            <a:srgbClr val="2B4660"/>
-                          </a:solidFill>
-                        </a:defRPr>
-                      </a:pPr>
-                      <a:r>
-                        <a:t>No</a:t>
-                      </a:r>
-                    </a:p>
-                  </a:txBody>
-                  <a:tcPr/>
-                </a:tc>
-                <a:tc>
-                  <a:txBody>
-                    <a:bodyPr/>
-                    <a:lstStyle/>
-                    <a:p>
-                      <a:pPr algn="ctr">
-                        <a:defRPr sz="900">
-                          <a:solidFill>
-                            <a:srgbClr val="028901"/>
-                          </a:solidFill>
-                        </a:defRPr>
-                      </a:pPr>
-                      <a:r>
-                        <a:t>CTMC (any disease)</a:t>
-                      </a:r>
-                    </a:p>
-                  </a:txBody>
-                  <a:tcPr/>
-                </a:tc>
-              </a:tr>
-              <a:tr h="365760">
-                <a:tc>
-                  <a:txBody>
-                    <a:bodyPr/>
-                    <a:lstStyle/>
-                    <a:p>
-                      <a:pPr algn="ctr">
-                        <a:defRPr sz="900">
-                          <a:solidFill>
-                            <a:srgbClr val="2B4660"/>
-                          </a:solidFill>
-                        </a:defRPr>
-                      </a:pPr>
-                      <a:r>
-                        <a:t>Confidence estimation</a:t>
-                      </a:r>
-                    </a:p>
-                  </a:txBody>
-                  <a:tcPr/>
-                </a:tc>
-                <a:tc>
-                  <a:txBody>
-                    <a:bodyPr/>
-                    <a:lstStyle/>
-                    <a:p>
-                      <a:pPr algn="ctr">
-                        <a:defRPr sz="900">
-                          <a:solidFill>
-                            <a:srgbClr val="2B4660"/>
-                          </a:solidFill>
-                        </a:defRPr>
-                      </a:pPr>
-                      <a:r>
-                        <a:t>No</a:t>
-                      </a:r>
-                    </a:p>
-                  </a:txBody>
-                  <a:tcPr/>
-                </a:tc>
-                <a:tc>
-                  <a:txBody>
-                    <a:bodyPr/>
-                    <a:lstStyle/>
-                    <a:p>
-                      <a:pPr algn="ctr">
-                        <a:defRPr sz="900">
-                          <a:solidFill>
-                            <a:srgbClr val="2B4660"/>
-                          </a:solidFill>
-                        </a:defRPr>
-                      </a:pPr>
-                      <a:r>
-                        <a:t>Uncalibrated</a:t>
-                      </a:r>
-                    </a:p>
-                  </a:txBody>
-                  <a:tcPr/>
-                </a:tc>
-                <a:tc>
-                  <a:txBody>
-                    <a:bodyPr/>
-                    <a:lstStyle/>
-                    <a:p>
-                      <a:pPr algn="ctr">
-                        <a:defRPr sz="900">
-                          <a:solidFill>
-                            <a:srgbClr val="028901"/>
-                          </a:solidFill>
-                        </a:defRPr>
-                      </a:pPr>
-                      <a:r>
-                        <a:t>Cost-optimal decisions</a:t>
-                      </a:r>
-                    </a:p>
-                  </a:txBody>
-                  <a:tcPr/>
-                </a:tc>
-              </a:tr>
-              <a:tr h="365760">
-                <a:tc>
-                  <a:txBody>
-                    <a:bodyPr/>
-                    <a:lstStyle/>
-                    <a:p>
-                      <a:pPr algn="ctr">
-                        <a:defRPr sz="900">
-                          <a:solidFill>
-                            <a:srgbClr val="2B4660"/>
-                          </a:solidFill>
-                        </a:defRPr>
-                      </a:pPr>
-                      <a:r>
-                        <a:t>Audit trail</a:t>
-                      </a:r>
-                    </a:p>
-                  </a:txBody>
-                  <a:tcPr/>
-                </a:tc>
-                <a:tc>
-                  <a:txBody>
-                    <a:bodyPr/>
-                    <a:lstStyle/>
-                    <a:p>
-                      <a:pPr algn="ctr">
-                        <a:defRPr sz="900">
-                          <a:solidFill>
-                            <a:srgbClr val="2B4660"/>
-                          </a:solidFill>
-                        </a:defRPr>
-                      </a:pPr>
-                      <a:r>
-                        <a:t>Manual</a:t>
-                      </a:r>
-                    </a:p>
-                  </a:txBody>
-                  <a:tcPr/>
-                </a:tc>
-                <a:tc>
-                  <a:txBody>
-                    <a:bodyPr/>
-                    <a:lstStyle/>
-                    <a:p>
-                      <a:pPr algn="ctr">
-                        <a:defRPr sz="900">
-                          <a:solidFill>
-                            <a:srgbClr val="2B4660"/>
-                          </a:solidFill>
-                        </a:defRPr>
-                      </a:pPr>
-                      <a:r>
-                        <a:t>None</a:t>
-                      </a:r>
-                    </a:p>
-                  </a:txBody>
-                  <a:tcPr/>
-                </a:tc>
-                <a:tc>
-                  <a:txBody>
-                    <a:bodyPr/>
-                    <a:lstStyle/>
-                    <a:p>
-                      <a:pPr algn="ctr">
-                        <a:defRPr sz="900">
-                          <a:solidFill>
-                            <a:srgbClr val="028901"/>
-                          </a:solidFill>
-                        </a:defRPr>
-                      </a:pPr>
-                      <a:r>
-                        <a:t>JSON Lines per case</a:t>
-                      </a:r>
-                    </a:p>
-                  </a:txBody>
-                  <a:tcPr/>
-                </a:tc>
-              </a:tr>
-              <a:tr h="365760">
-                <a:tc>
-                  <a:txBody>
-                    <a:bodyPr/>
-                    <a:lstStyle/>
-                    <a:p>
-                      <a:pPr algn="ctr">
-                        <a:defRPr sz="900">
-                          <a:solidFill>
-                            <a:srgbClr val="2B4660"/>
-                          </a:solidFill>
-                        </a:defRPr>
-                      </a:pPr>
-                      <a:r>
-                        <a:t>EU AI Act ready</a:t>
-                      </a:r>
-                    </a:p>
-                  </a:txBody>
-                  <a:tcPr/>
-                </a:tc>
-                <a:tc>
-                  <a:txBody>
-                    <a:bodyPr/>
-                    <a:lstStyle/>
-                    <a:p>
-                      <a:pPr algn="ctr">
-                        <a:defRPr sz="900">
-                          <a:solidFill>
-                            <a:srgbClr val="2B4660"/>
-                          </a:solidFill>
-                        </a:defRPr>
-                      </a:pPr>
-                      <a:r>
-                        <a:t>Partial</a:t>
-                      </a:r>
-                    </a:p>
-                  </a:txBody>
-                  <a:tcPr/>
-                </a:tc>
-                <a:tc>
-                  <a:txBody>
-                    <a:bodyPr/>
-                    <a:lstStyle/>
-                    <a:p>
-                      <a:pPr algn="ctr">
-                        <a:defRPr sz="900">
-                          <a:solidFill>
-                            <a:srgbClr val="2B4660"/>
-                          </a:solidFill>
-                        </a:defRPr>
-                      </a:pPr>
-                      <a:r>
-                        <a:t>Difficult</a:t>
-                      </a:r>
-                    </a:p>
-                  </a:txBody>
-                  <a:tcPr/>
-                </a:tc>
-                <a:tc>
-                  <a:txBody>
-                    <a:bodyPr/>
-                    <a:lstStyle/>
-                    <a:p>
-                      <a:pPr algn="ctr">
-                        <a:defRPr sz="900">
-                          <a:solidFill>
-                            <a:srgbClr val="028901"/>
-                          </a:solidFill>
-                        </a:defRPr>
-                      </a:pPr>
-                      <a:r>
-                        <a:t>Built-in (Art. 14, 15)</a:t>
-                      </a:r>
-                    </a:p>
-                  </a:txBody>
-                  <a:tcPr/>
-                </a:tc>
-              </a:tr>
-            </a:tbl>
-          </a:graphicData>
-        </a:graphic>
-      </p:graphicFrame>
-      <p:sp>
-        <p:nvSpPr>
-          <p:cNvPr id="4" name="TextBox 3"/>
-          <p:cNvSpPr txBox="1"/>
-          <p:nvPr/>
-        </p:nvSpPr>
-        <p:spPr>
-          <a:xfrm>
-            <a:off x="731520" y="4754880"/>
-            <a:ext cx="10058400" cy="457200"/>
-          </a:xfrm>
-          <a:prstGeom prst="rect">
-            <a:avLst/>
-          </a:prstGeom>
-          <a:noFill/>
-        </p:spPr>
-        <p:txBody>
-          <a:bodyPr wrap="square">
-            <a:spAutoFit/>
-          </a:bodyPr>
-          <a:lstStyle/>
-          <a:p>
-            <a:pPr algn="l">
-              <a:defRPr sz="1600" b="1">
-                <a:solidFill>
-                  <a:srgbClr val="0D2339"/>
-                </a:solidFill>
-              </a:defRPr>
-            </a:pPr>
-            <a:r>
-              <a:t>LLM Extension (Phase 3 Vision):</a:t>
-            </a:r>
-          </a:p>
-          <a:p>
-            <a:pPr>
-              <a:spcBef>
-                <a:spcPts val="400"/>
-              </a:spcBef>
-              <a:defRPr sz="1200">
-                <a:solidFill>
-                  <a:srgbClr val="2B4660"/>
-                </a:solidFill>
-              </a:defRPr>
-            </a:pPr>
-            <a:r>
-              <a:t>Unstructured record extraction -- LLMs read doctor notes in DE/FR/ES/EN</a:t>
-            </a:r>
-          </a:p>
-          <a:p>
-            <a:pPr>
-              <a:spcBef>
-                <a:spcPts val="400"/>
-              </a:spcBef>
-              <a:defRPr sz="1200">
-                <a:solidFill>
-                  <a:srgbClr val="2B4660"/>
-                </a:solidFill>
-              </a:defRPr>
-            </a:pPr>
-            <a:r>
-              <a:t>Natural language explanations -- human-readable risk narratives instead of SHAP values</a:t>
-            </a:r>
-          </a:p>
-          <a:p>
-            <a:pPr>
-              <a:spcBef>
-                <a:spcPts val="400"/>
-              </a:spcBef>
-              <a:defRPr sz="1200">
-                <a:solidFill>
-                  <a:srgbClr val="2B4660"/>
-                </a:solidFill>
-              </a:defRPr>
-            </a:pPr>
-            <a:r>
-              <a:t>Literature-calibrated parameters -- LLM agents verify rates against PubMed continuously</a:t>
-            </a:r>
-          </a:p>
-        </p:txBody>
-      </p:sp>
-    </p:spTree>
-  </p:cSld>
-  <p:clrMapOvr>
-    <a:masterClrMapping/>
-  </p:clrMapOvr>
-</p:sld>
-</file>
-
-<file path=ppt/slides/slide12.xml><?xml version="1.0" encoding="utf-8"?>
-<p:sld xmlns:a="http://schemas.openxmlformats.org/drawingml/2006/main" xmlns:p="http://schemas.openxmlformats.org/presentationml/2006/main" xmlns:r="http://schemas.openxmlformats.org/officeDocument/2006/relationships">
-  <p:cSld>
-    <p:spTree>
-      <p:nvGrpSpPr>
-        <p:cNvPr id="1" name=""/>
-        <p:cNvGrpSpPr/>
-        <p:nvPr/>
-      </p:nvGrpSpPr>
-      <p:grpSpPr/>
-      <p:sp>
-        <p:nvSpPr>
-          <p:cNvPr id="2" name="TextBox 1"/>
-          <p:cNvSpPr txBox="1"/>
-          <p:nvPr/>
-        </p:nvSpPr>
-        <p:spPr>
-          <a:xfrm>
-            <a:off x="731520" y="457200"/>
-            <a:ext cx="10058400" cy="731520"/>
-          </a:xfrm>
-          <a:prstGeom prst="rect">
-            <a:avLst/>
-          </a:prstGeom>
-          <a:noFill/>
-        </p:spPr>
-        <p:txBody>
-          <a:bodyPr wrap="square">
-            <a:spAutoFit/>
-          </a:bodyPr>
-          <a:lstStyle/>
-          <a:p>
-            <a:pPr algn="l">
-              <a:defRPr sz="3200" b="1">
-                <a:solidFill>
-                  <a:srgbClr val="0D2339"/>
-                </a:solidFill>
-              </a:defRPr>
-            </a:pPr>
-            <a:r>
-              <a:t>Validation &amp; Testing</a:t>
-            </a:r>
-          </a:p>
-        </p:txBody>
-      </p:sp>
-      <p:sp>
-        <p:nvSpPr>
-          <p:cNvPr id="3" name="Rectangle 2"/>
-          <p:cNvSpPr/>
-          <p:nvPr/>
-        </p:nvSpPr>
-        <p:spPr>
-          <a:xfrm>
-            <a:off x="1371600" y="1645920"/>
-            <a:ext cx="2743200" cy="1828800"/>
-          </a:xfrm>
-          <a:prstGeom prst="rect">
-            <a:avLst/>
-          </a:prstGeom>
-          <a:solidFill>
-            <a:srgbClr val="E7F4FD"/>
-          </a:solidFill>
-          <a:ln>
-            <a:solidFill>
-              <a:srgbClr val="C4CDD6"/>
-            </a:solidFill>
-          </a:ln>
-        </p:spPr>
-        <p:style>
-          <a:lnRef idx="1">
-            <a:schemeClr val="accent1"/>
-          </a:lnRef>
-          <a:fillRef idx="3">
-            <a:schemeClr val="accent1"/>
-          </a:fillRef>
-          <a:effectRef idx="2">
-            <a:schemeClr val="accent1"/>
-          </a:effectRef>
-          <a:fontRef idx="minor">
-            <a:schemeClr val="lt1"/>
-          </a:fontRef>
-        </p:style>
-        <p:txBody>
-          <a:bodyPr rtlCol="0" anchor="ctr" wrap="square"/>
-          <a:lstStyle/>
-          <a:p>
             <a:pPr algn="ctr">
-              <a:defRPr sz="3600" b="1">
-                <a:solidFill>
-                  <a:srgbClr val="0D2339"/>
-                </a:solidFill>
-              </a:defRPr>
-            </a:pPr>
-            <a:r>
-              <a:t>231</a:t>
-            </a:r>
-          </a:p>
-          <a:p>
-            <a:pPr algn="ctr">
-              <a:defRPr sz="1200">
-                <a:solidFill>
-                  <a:srgbClr val="107ACA"/>
-                </a:solidFill>
-              </a:defRPr>
-            </a:pPr>
-            <a:r>
-              <a:t>Tests Passing</a:t>
-            </a:r>
-          </a:p>
-        </p:txBody>
-      </p:sp>
-      <p:sp>
-        <p:nvSpPr>
-          <p:cNvPr id="4" name="Rectangle 3"/>
-          <p:cNvSpPr/>
-          <p:nvPr/>
-        </p:nvSpPr>
-        <p:spPr>
-          <a:xfrm>
-            <a:off x="4572000" y="1645920"/>
-            <a:ext cx="2743200" cy="1828800"/>
-          </a:xfrm>
-          <a:prstGeom prst="rect">
-            <a:avLst/>
-          </a:prstGeom>
-          <a:solidFill>
-            <a:srgbClr val="E7F4FD"/>
-          </a:solidFill>
-          <a:ln>
-            <a:solidFill>
-              <a:srgbClr val="C4CDD6"/>
-            </a:solidFill>
-          </a:ln>
-        </p:spPr>
-        <p:style>
-          <a:lnRef idx="1">
-            <a:schemeClr val="accent1"/>
-          </a:lnRef>
-          <a:fillRef idx="3">
-            <a:schemeClr val="accent1"/>
-          </a:fillRef>
-          <a:effectRef idx="2">
-            <a:schemeClr val="accent1"/>
-          </a:effectRef>
-          <a:fontRef idx="minor">
-            <a:schemeClr val="lt1"/>
-          </a:fontRef>
-        </p:style>
-        <p:txBody>
-          <a:bodyPr rtlCol="0" anchor="ctr" wrap="square"/>
-          <a:lstStyle/>
-          <a:p>
-            <a:pPr algn="ctr">
-              <a:defRPr sz="3600" b="1">
-                <a:solidFill>
-                  <a:srgbClr val="0D2339"/>
-                </a:solidFill>
-              </a:defRPr>
-            </a:pPr>
-            <a:r>
-              <a:t>0.71</a:t>
-            </a:r>
-          </a:p>
-          <a:p>
-            <a:pPr algn="ctr">
-              <a:defRPr sz="1200">
-                <a:solidFill>
-                  <a:srgbClr val="107ACA"/>
-                </a:solidFill>
-              </a:defRPr>
-            </a:pPr>
-            <a:r>
-              <a:t>AUC-ROC</a:t>
-            </a:r>
-          </a:p>
-        </p:txBody>
-      </p:sp>
-      <p:sp>
-        <p:nvSpPr>
-          <p:cNvPr id="5" name="Rectangle 4"/>
-          <p:cNvSpPr/>
-          <p:nvPr/>
-        </p:nvSpPr>
-        <p:spPr>
-          <a:xfrm>
-            <a:off x="7772400" y="1645920"/>
-            <a:ext cx="2743200" cy="1828800"/>
-          </a:xfrm>
-          <a:prstGeom prst="rect">
-            <a:avLst/>
-          </a:prstGeom>
-          <a:solidFill>
-            <a:srgbClr val="E7F4FD"/>
-          </a:solidFill>
-          <a:ln>
-            <a:solidFill>
-              <a:srgbClr val="C4CDD6"/>
-            </a:solidFill>
-          </a:ln>
-        </p:spPr>
-        <p:style>
-          <a:lnRef idx="1">
-            <a:schemeClr val="accent1"/>
-          </a:lnRef>
-          <a:fillRef idx="3">
-            <a:schemeClr val="accent1"/>
-          </a:fillRef>
-          <a:effectRef idx="2">
-            <a:schemeClr val="accent1"/>
-          </a:effectRef>
-          <a:fontRef idx="minor">
-            <a:schemeClr val="lt1"/>
-          </a:fontRef>
-        </p:style>
-        <p:txBody>
-          <a:bodyPr rtlCol="0" anchor="ctr" wrap="square"/>
-          <a:lstStyle/>
-          <a:p>
-            <a:pPr algn="ctr">
-              <a:defRPr sz="3600" b="1">
-                <a:solidFill>
-                  <a:srgbClr val="0D2339"/>
-                </a:solidFill>
-              </a:defRPr>
-            </a:pPr>
-            <a:r>
-              <a:t>0.010</a:t>
-            </a:r>
-          </a:p>
-          <a:p>
-            <a:pPr algn="ctr">
-              <a:defRPr sz="1200">
-                <a:solidFill>
-                  <a:srgbClr val="107ACA"/>
-                </a:solidFill>
-              </a:defRPr>
-            </a:pPr>
-            <a:r>
-              <a:t>Brier Score</a:t>
-            </a:r>
-          </a:p>
-        </p:txBody>
-      </p:sp>
-      <p:sp>
-        <p:nvSpPr>
-          <p:cNvPr id="6" name="Rectangle 5"/>
-          <p:cNvSpPr/>
-          <p:nvPr/>
-        </p:nvSpPr>
-        <p:spPr>
-          <a:xfrm>
-            <a:off x="1371600" y="3931920"/>
-            <a:ext cx="2743200" cy="1828800"/>
-          </a:xfrm>
-          <a:prstGeom prst="rect">
-            <a:avLst/>
-          </a:prstGeom>
-          <a:solidFill>
-            <a:srgbClr val="E7F4FD"/>
-          </a:solidFill>
-          <a:ln>
-            <a:solidFill>
-              <a:srgbClr val="C4CDD6"/>
-            </a:solidFill>
-          </a:ln>
-        </p:spPr>
-        <p:style>
-          <a:lnRef idx="1">
-            <a:schemeClr val="accent1"/>
-          </a:lnRef>
-          <a:fillRef idx="3">
-            <a:schemeClr val="accent1"/>
-          </a:fillRef>
-          <a:effectRef idx="2">
-            <a:schemeClr val="accent1"/>
-          </a:effectRef>
-          <a:fontRef idx="minor">
-            <a:schemeClr val="lt1"/>
-          </a:fontRef>
-        </p:style>
-        <p:txBody>
-          <a:bodyPr rtlCol="0" anchor="ctr" wrap="square"/>
-          <a:lstStyle/>
-          <a:p>
-            <a:pPr algn="ctr">
-              <a:defRPr sz="3600" b="1">
-                <a:solidFill>
-                  <a:srgbClr val="0D2339"/>
-                </a:solidFill>
-              </a:defRPr>
-            </a:pPr>
-            <a:r>
-              <a:t>0.72</a:t>
-            </a:r>
-          </a:p>
-          <a:p>
-            <a:pPr algn="ctr">
-              <a:defRPr sz="1200">
-                <a:solidFill>
-                  <a:srgbClr val="107ACA"/>
-                </a:solidFill>
-              </a:defRPr>
-            </a:pPr>
-            <a:r>
-              <a:t>C-index</a:t>
-            </a:r>
-          </a:p>
-        </p:txBody>
-      </p:sp>
-      <p:sp>
-        <p:nvSpPr>
-          <p:cNvPr id="7" name="Rectangle 6"/>
-          <p:cNvSpPr/>
-          <p:nvPr/>
-        </p:nvSpPr>
-        <p:spPr>
-          <a:xfrm>
-            <a:off x="4572000" y="3931920"/>
-            <a:ext cx="2743200" cy="1828800"/>
-          </a:xfrm>
-          <a:prstGeom prst="rect">
-            <a:avLst/>
-          </a:prstGeom>
-          <a:solidFill>
-            <a:srgbClr val="E7F4FD"/>
-          </a:solidFill>
-          <a:ln>
-            <a:solidFill>
-              <a:srgbClr val="C4CDD6"/>
-            </a:solidFill>
-          </a:ln>
-        </p:spPr>
-        <p:style>
-          <a:lnRef idx="1">
-            <a:schemeClr val="accent1"/>
-          </a:lnRef>
-          <a:fillRef idx="3">
-            <a:schemeClr val="accent1"/>
-          </a:fillRef>
-          <a:effectRef idx="2">
-            <a:schemeClr val="accent1"/>
-          </a:effectRef>
-          <a:fontRef idx="minor">
-            <a:schemeClr val="lt1"/>
-          </a:fontRef>
-        </p:style>
-        <p:txBody>
-          <a:bodyPr rtlCol="0" anchor="ctr" wrap="square"/>
-          <a:lstStyle/>
-          <a:p>
-            <a:pPr algn="ctr">
-              <a:defRPr sz="3600" b="1">
-                <a:solidFill>
-                  <a:srgbClr val="0D2339"/>
-                </a:solidFill>
-              </a:defRPr>
-            </a:pPr>
-            <a:r>
-              <a:t>4,000</a:t>
-            </a:r>
-          </a:p>
-          <a:p>
-            <a:pPr algn="ctr">
-              <a:defRPr sz="1200">
-                <a:solidFill>
-                  <a:srgbClr val="107ACA"/>
-                </a:solidFill>
-              </a:defRPr>
-            </a:pPr>
-            <a:r>
-              <a:t>Synthetic Patients</a:t>
-            </a:r>
-          </a:p>
-        </p:txBody>
-      </p:sp>
-      <p:sp>
-        <p:nvSpPr>
-          <p:cNvPr id="8" name="Rectangle 7"/>
-          <p:cNvSpPr/>
-          <p:nvPr/>
-        </p:nvSpPr>
-        <p:spPr>
-          <a:xfrm>
-            <a:off x="7772400" y="3931920"/>
-            <a:ext cx="2743200" cy="1828800"/>
-          </a:xfrm>
-          <a:prstGeom prst="rect">
-            <a:avLst/>
-          </a:prstGeom>
-          <a:solidFill>
-            <a:srgbClr val="E7F4FD"/>
-          </a:solidFill>
-          <a:ln>
-            <a:solidFill>
-              <a:srgbClr val="C4CDD6"/>
-            </a:solidFill>
-          </a:ln>
-        </p:spPr>
-        <p:style>
-          <a:lnRef idx="1">
-            <a:schemeClr val="accent1"/>
-          </a:lnRef>
-          <a:fillRef idx="3">
-            <a:schemeClr val="accent1"/>
-          </a:fillRef>
-          <a:effectRef idx="2">
-            <a:schemeClr val="accent1"/>
-          </a:effectRef>
-          <a:fontRef idx="minor">
-            <a:schemeClr val="lt1"/>
-          </a:fontRef>
-        </p:style>
-        <p:txBody>
-          <a:bodyPr rtlCol="0" anchor="ctr" wrap="square"/>
-          <a:lstStyle/>
-          <a:p>
-            <a:pPr algn="ctr">
-              <a:defRPr sz="3600" b="1">
-                <a:solidFill>
-                  <a:srgbClr val="0D2339"/>
-                </a:solidFill>
-              </a:defRPr>
-            </a:pPr>
-            <a:r>
-              <a:t>2</a:t>
-            </a:r>
-          </a:p>
-          <a:p>
-            <a:pPr algn="ctr">
-              <a:defRPr sz="1200">
-                <a:solidFill>
-                  <a:srgbClr val="107ACA"/>
-                </a:solidFill>
-              </a:defRPr>
-            </a:pPr>
-            <a:r>
-              <a:t>Disease Models</a:t>
-            </a:r>
-          </a:p>
-        </p:txBody>
-      </p:sp>
-    </p:spTree>
-  </p:cSld>
-  <p:clrMapOvr>
-    <a:masterClrMapping/>
-  </p:clrMapOvr>
-</p:sld>
-</file>
-
-<file path=ppt/slides/slide13.xml><?xml version="1.0" encoding="utf-8"?>
-<p:sld xmlns:a="http://schemas.openxmlformats.org/drawingml/2006/main" xmlns:p="http://schemas.openxmlformats.org/presentationml/2006/main" xmlns:r="http://schemas.openxmlformats.org/officeDocument/2006/relationships">
-  <p:cSld>
-    <p:spTree>
-      <p:nvGrpSpPr>
-        <p:cNvPr id="1" name=""/>
-        <p:cNvGrpSpPr/>
-        <p:nvPr/>
-      </p:nvGrpSpPr>
-      <p:grpSpPr/>
-      <p:sp>
-        <p:nvSpPr>
-          <p:cNvPr id="2" name="TextBox 1"/>
-          <p:cNvSpPr txBox="1"/>
-          <p:nvPr/>
-        </p:nvSpPr>
-        <p:spPr>
-          <a:xfrm>
-            <a:off x="731520" y="457200"/>
-            <a:ext cx="10058400" cy="731520"/>
-          </a:xfrm>
-          <a:prstGeom prst="rect">
-            <a:avLst/>
-          </a:prstGeom>
-          <a:noFill/>
-        </p:spPr>
-        <p:txBody>
-          <a:bodyPr wrap="square">
-            <a:spAutoFit/>
-          </a:bodyPr>
-          <a:lstStyle/>
-          <a:p>
-            <a:pPr algn="l">
-              <a:defRPr sz="3200" b="1">
-                <a:solidFill>
-                  <a:srgbClr val="0D2339"/>
-                </a:solidFill>
-              </a:defRPr>
-            </a:pPr>
-            <a:r>
-              <a:t>What I'd Do in the First 90 Days</a:t>
-            </a:r>
-          </a:p>
-        </p:txBody>
-      </p:sp>
-      <p:sp>
-        <p:nvSpPr>
-          <p:cNvPr id="3" name="TextBox 2"/>
-          <p:cNvSpPr txBox="1"/>
-          <p:nvPr/>
-        </p:nvSpPr>
-        <p:spPr>
-          <a:xfrm>
-            <a:off x="731520" y="1463040"/>
-            <a:ext cx="10058400" cy="457200"/>
-          </a:xfrm>
-          <a:prstGeom prst="rect">
-            <a:avLst/>
-          </a:prstGeom>
-          <a:noFill/>
-        </p:spPr>
-        <p:txBody>
-          <a:bodyPr wrap="square">
-            <a:spAutoFit/>
-          </a:bodyPr>
-          <a:lstStyle/>
-          <a:p>
-            <a:pPr algn="l">
-              <a:defRPr sz="1400" b="0">
-                <a:solidFill>
-                  <a:srgbClr val="2B4660"/>
-                </a:solidFill>
-              </a:defRPr>
-            </a:pPr>
-          </a:p>
-          <a:p>
-            <a:pPr>
-              <a:spcBef>
-                <a:spcPts val="400"/>
-              </a:spcBef>
-              <a:defRPr sz="1400">
-                <a:solidFill>
-                  <a:srgbClr val="2B4660"/>
-                </a:solidFill>
-              </a:defRPr>
-            </a:pPr>
-            <a:r>
-              <a:t>Month 1: Audit current pipeline for PBW risk. Map data quality across Allianz markets.</a:t>
-            </a:r>
-          </a:p>
-          <a:p>
-            <a:pPr>
-              <a:spcBef>
-                <a:spcPts val="400"/>
-              </a:spcBef>
-              <a:defRPr sz="1400">
-                <a:solidFill>
-                  <a:srgbClr val="2B4660"/>
-                </a:solidFill>
-              </a:defRPr>
-            </a:pPr>
-            <a:r>
-              <a:t>Month 2: Calibrate DQS on real data. First real-data PBW prevalence estimate.</a:t>
-            </a:r>
-          </a:p>
-          <a:p>
-            <a:pPr>
-              <a:spcBef>
-                <a:spcPts val="400"/>
-              </a:spcBef>
-              <a:defRPr sz="1400">
-                <a:solidFill>
-                  <a:srgbClr val="2B4660"/>
-                </a:solidFill>
-              </a:defRPr>
-            </a:pPr>
-            <a:r>
-              <a:t>Month 3: Production prototype with REST API, validated detection rates, EU AI Act docs.</a:t>
-            </a:r>
-          </a:p>
-        </p:txBody>
-      </p:sp>
-      <p:sp>
-        <p:nvSpPr>
-          <p:cNvPr id="4" name="TextBox 3"/>
-          <p:cNvSpPr txBox="1"/>
-          <p:nvPr/>
-        </p:nvSpPr>
-        <p:spPr>
-          <a:xfrm>
-            <a:off x="731520" y="3657600"/>
-            <a:ext cx="10058400" cy="457200"/>
-          </a:xfrm>
-          <a:prstGeom prst="rect">
-            <a:avLst/>
-          </a:prstGeom>
-          <a:noFill/>
-        </p:spPr>
-        <p:txBody>
-          <a:bodyPr wrap="square">
-            <a:spAutoFit/>
-          </a:bodyPr>
-          <a:lstStyle/>
-          <a:p>
-            <a:pPr algn="l">
-              <a:defRPr sz="1800" b="1">
-                <a:solidFill>
-                  <a:srgbClr val="0D2339"/>
-                </a:solidFill>
-              </a:defRPr>
-            </a:pPr>
-            <a:r>
-              <a:t>What you get:</a:t>
-            </a:r>
-          </a:p>
-          <a:p>
-            <a:pPr>
-              <a:spcBef>
-                <a:spcPts val="400"/>
-              </a:spcBef>
-              <a:defRPr sz="1400">
-                <a:solidFill>
-                  <a:srgbClr val="2B4660"/>
-                </a:solidFill>
-              </a:defRPr>
-            </a:pPr>
-            <a:r>
-              <a:t>I built this entire system in ~48 hours with Claude -- imagine 90 days with real data</a:t>
-            </a:r>
-          </a:p>
-          <a:p>
-            <a:pPr>
-              <a:spcBef>
-                <a:spcPts val="400"/>
-              </a:spcBef>
-              <a:defRPr sz="1400">
-                <a:solidFill>
-                  <a:srgbClr val="2B4660"/>
-                </a:solidFill>
-              </a:defRPr>
-            </a:pPr>
-            <a:r>
-              <a:t>PhD bioinformatics + AI tools = output that normally takes a team of 3-5 developers</a:t>
-            </a:r>
-          </a:p>
-          <a:p>
-            <a:pPr>
-              <a:spcBef>
-                <a:spcPts val="400"/>
-              </a:spcBef>
-              <a:defRPr sz="1400">
-                <a:solidFill>
-                  <a:srgbClr val="2B4660"/>
-                </a:solidFill>
-              </a:defRPr>
-            </a:pPr>
-            <a:r>
-              <a:t>Domain expertise: genomics, disease progression, clinical coding, EU AI Act</a:t>
-            </a:r>
-          </a:p>
-        </p:txBody>
-      </p:sp>
-    </p:spTree>
-  </p:cSld>
-  <p:clrMapOvr>
-    <a:masterClrMapping/>
-  </p:clrMapOvr>
-</p:sld>
-</file>
-
-<file path=ppt/slides/slide14.xml><?xml version="1.0" encoding="utf-8"?>
-<p:sld xmlns:a="http://schemas.openxmlformats.org/drawingml/2006/main" xmlns:p="http://schemas.openxmlformats.org/presentationml/2006/main" xmlns:r="http://schemas.openxmlformats.org/officeDocument/2006/relationships">
-  <p:cSld>
-    <p:spTree>
-      <p:nvGrpSpPr>
-        <p:cNvPr id="1" name=""/>
-        <p:cNvGrpSpPr/>
-        <p:nvPr/>
-      </p:nvGrpSpPr>
-      <p:grpSpPr/>
-      <p:sp>
-        <p:nvSpPr>
-          <p:cNvPr id="2" name="TextBox 1"/>
-          <p:cNvSpPr txBox="1"/>
-          <p:nvPr/>
-        </p:nvSpPr>
-        <p:spPr>
-          <a:xfrm>
-            <a:off x="1371600" y="2286000"/>
-            <a:ext cx="9144000" cy="1097280"/>
-          </a:xfrm>
-          <a:prstGeom prst="rect">
-            <a:avLst/>
-          </a:prstGeom>
-          <a:noFill/>
-        </p:spPr>
-        <p:txBody>
-          <a:bodyPr wrap="square">
-            <a:spAutoFit/>
-          </a:bodyPr>
-          <a:lstStyle/>
-          <a:p>
-            <a:pPr algn="ctr">
-              <a:defRPr sz="4400" b="1">
-                <a:solidFill>
-                  <a:srgbClr val="0D2339"/>
-                </a:solidFill>
-              </a:defRPr>
-            </a:pPr>
-            <a:r>
-              <a:t>Thank You</a:t>
-            </a:r>
-          </a:p>
-        </p:txBody>
-      </p:sp>
-      <p:sp>
-        <p:nvSpPr>
-          <p:cNvPr id="3" name="TextBox 2"/>
-          <p:cNvSpPr txBox="1"/>
-          <p:nvPr/>
-        </p:nvSpPr>
-        <p:spPr>
-          <a:xfrm>
-            <a:off x="1371600" y="3657600"/>
-            <a:ext cx="9144000" cy="457200"/>
-          </a:xfrm>
-          <a:prstGeom prst="rect">
-            <a:avLst/>
-          </a:prstGeom>
-          <a:noFill/>
-        </p:spPr>
-        <p:txBody>
-          <a:bodyPr wrap="square">
-            <a:spAutoFit/>
-          </a:bodyPr>
-          <a:lstStyle/>
-          <a:p>
-            <a:pPr algn="ctr">
-              <a:defRPr sz="1800" b="0">
-                <a:solidFill>
-                  <a:srgbClr val="2B4660"/>
-                </a:solidFill>
-              </a:defRPr>
-            </a:pPr>
-            <a:r>
-              <a:t>Tim Reska | Helmholtz Munich</a:t>
-            </a:r>
-          </a:p>
-        </p:txBody>
-      </p:sp>
-      <p:sp>
-        <p:nvSpPr>
-          <p:cNvPr id="4" name="TextBox 3"/>
-          <p:cNvSpPr txBox="1"/>
-          <p:nvPr/>
-        </p:nvSpPr>
-        <p:spPr>
-          <a:xfrm>
-            <a:off x="1371600" y="5029200"/>
-            <a:ext cx="9144000" cy="457200"/>
-          </a:xfrm>
-          <a:prstGeom prst="rect">
-            <a:avLst/>
-          </a:prstGeom>
-          <a:noFill/>
-        </p:spPr>
-        <p:txBody>
-          <a:bodyPr wrap="square">
-            <a:spAutoFit/>
-          </a:bodyPr>
-          <a:lstStyle/>
-          <a:p>
-            <a:pPr algn="ctr">
-              <a:defRPr sz="1200" b="0">
+              <a:defRPr sz="1100" b="0">
                 <a:solidFill>
                   <a:srgbClr val="61788E"/>
                 </a:solidFill>
               </a:defRPr>
             </a:pPr>
             <a:r>
-              <a:t>Proof of Concept | All data is synthetic | March 2026</a:t>
+              <a:t>All data in this demo is synthetic. The system, the science, and the skills are real.</a:t>
             </a:r>
           </a:p>
         </p:txBody>
@@ -5136,8 +3464,8 @@
         </p:nvSpPr>
         <p:spPr>
           <a:xfrm>
-            <a:off x="731520" y="457200"/>
-            <a:ext cx="10058400" cy="731520"/>
+            <a:off x="731520" y="365760"/>
+            <a:ext cx="10515600" cy="731520"/>
           </a:xfrm>
           <a:prstGeom prst="rect">
             <a:avLst/>
@@ -5151,14 +3479,14 @@
           <a:lstStyle/>
           <a:p>
             <a:pPr algn="l">
-              <a:defRPr sz="3600" b="1">
+              <a:defRPr sz="2800" b="1">
                 <a:solidFill>
                   <a:srgbClr val="0D2339"/>
                 </a:solidFill>
               </a:defRPr>
             </a:pPr>
             <a:r>
-              <a:t>Tim Reska</a:t>
+              <a:t>My published pipeline exposed 'plausible but wrong' LLM outputs</a:t>
             </a:r>
           </a:p>
         </p:txBody>
@@ -5171,8 +3499,8 @@
         </p:nvSpPr>
         <p:spPr>
           <a:xfrm>
-            <a:off x="731520" y="1188720"/>
-            <a:ext cx="10058400" cy="457200"/>
+            <a:off x="731520" y="1097280"/>
+            <a:ext cx="10515600" cy="365760"/>
           </a:xfrm>
           <a:prstGeom prst="rect">
             <a:avLst/>
@@ -5186,14 +3514,14 @@
           <a:lstStyle/>
           <a:p>
             <a:pPr algn="l">
-              <a:defRPr sz="1600" b="0">
+              <a:defRPr sz="1400" b="0">
                 <a:solidFill>
                   <a:srgbClr val="107ACA"/>
                 </a:solidFill>
               </a:defRPr>
             </a:pPr>
             <a:r>
-              <a:t>PhD Researcher | Helmholtz Munich &amp; TU Munich | github.com/ttmgr</a:t>
+              <a:t>PhD Helmholtz Munich &amp; TU Munich  |  github.com/ttmgr</a:t>
             </a:r>
           </a:p>
         </p:txBody>
@@ -5206,8 +3534,8 @@
         </p:nvSpPr>
         <p:spPr>
           <a:xfrm>
-            <a:off x="731520" y="2011680"/>
-            <a:ext cx="10058400" cy="457200"/>
+            <a:off x="731520" y="1828800"/>
+            <a:ext cx="5029200" cy="365760"/>
           </a:xfrm>
           <a:prstGeom prst="rect">
             <a:avLst/>
@@ -5221,12 +3549,15 @@
           <a:lstStyle/>
           <a:p>
             <a:pPr algn="l">
-              <a:defRPr sz="1300" b="0">
-                <a:solidFill>
-                  <a:srgbClr val="2B4660"/>
-                </a:solidFill>
-              </a:defRPr>
-            </a:pPr>
+              <a:defRPr sz="1600" b="1">
+                <a:solidFill>
+                  <a:srgbClr val="0D2339"/>
+                </a:solidFill>
+              </a:defRPr>
+            </a:pPr>
+            <a:r>
+              <a:t>Research &amp; Publications</a:t>
+            </a:r>
           </a:p>
           <a:p>
             <a:pPr>
@@ -5240,7 +3571,7 @@
               </a:defRPr>
             </a:pPr>
             <a:r>
-              <a:t>"Plausible but Wrong" -- coined in my own peer-reviewed research (ISME Communications 2024). 22 LLMs evaluated over 36 months. Same concept applied to underwriting.</a:t>
+              <a:t>8 peer-reviewed publications including Nature Communications</a:t>
             </a:r>
           </a:p>
           <a:p>
@@ -5255,7 +3586,7 @@
               </a:defRPr>
             </a:pPr>
             <a:r>
-              <a:t>3 years evaluating Claude (Sonnet 3.5 -&gt; 4.6). Integrated Claude + MCP into live pipelines, -40% development time.</a:t>
+              <a:t>22,000+ accesses, 43+ citations</a:t>
             </a:r>
           </a:p>
           <a:p>
@@ -5270,7 +3601,7 @@
               </a:defRPr>
             </a:pPr>
             <a:r>
-              <a:t>8 publications (Nature Communications). Invited speaker: ETH Zurich, Cambridge, TUM. 22,000+ accesses, 43+ citations.</a:t>
+              <a:t>Invited speaker: ETH Zurich, Cambridge, TUM</a:t>
             </a:r>
           </a:p>
           <a:p>
@@ -5285,7 +3616,42 @@
               </a:defRPr>
             </a:pPr>
             <a:r>
-              <a:t>GenomicsForOneHealth: 10 pipelines across 7 international sites (DE/FR/ES). Led 12-site multinational surveillance campaign.</a:t>
+              <a:t>PhD thesis: real-time genomics for pathogen detection</a:t>
+            </a:r>
+          </a:p>
+        </p:txBody>
+      </p:sp>
+      <p:sp>
+        <p:nvSpPr>
+          <p:cNvPr id="5" name="TextBox 4"/>
+          <p:cNvSpPr txBox="1"/>
+          <p:nvPr/>
+        </p:nvSpPr>
+        <p:spPr>
+          <a:xfrm>
+            <a:off x="6217920" y="1828800"/>
+            <a:ext cx="5029200" cy="365760"/>
+          </a:xfrm>
+          <a:prstGeom prst="rect">
+            <a:avLst/>
+          </a:prstGeom>
+          <a:noFill/>
+        </p:spPr>
+        <p:txBody>
+          <a:bodyPr wrap="square">
+            <a:spAutoFit/>
+          </a:bodyPr>
+          <a:lstStyle/>
+          <a:p>
+            <a:pPr algn="l">
+              <a:defRPr sz="1600" b="1">
+                <a:solidFill>
+                  <a:srgbClr val="0D2339"/>
+                </a:solidFill>
+              </a:defRPr>
+            </a:pPr>
+            <a:r>
+              <a:t>AI &amp; Claude Expertise</a:t>
             </a:r>
           </a:p>
           <a:p>
@@ -5300,7 +3666,87 @@
               </a:defRPr>
             </a:pPr>
             <a:r>
-              <a:t>Built this entire system in ~48 hours with Claude.</a:t>
+              <a:t>36-month LLM evaluation: 22 models (GPT, Claude, Gemini)</a:t>
+            </a:r>
+          </a:p>
+          <a:p>
+            <a:pPr>
+              <a:spcBef>
+                <a:spcPts val="400"/>
+              </a:spcBef>
+              <a:defRPr sz="1300">
+                <a:solidFill>
+                  <a:srgbClr val="2B4660"/>
+                </a:solidFill>
+              </a:defRPr>
+            </a:pPr>
+            <a:r>
+              <a:t>Observed 'plausible but wrong' across all 3 LLM families (22 models)</a:t>
+            </a:r>
+          </a:p>
+          <a:p>
+            <a:pPr>
+              <a:spcBef>
+                <a:spcPts val="400"/>
+              </a:spcBef>
+              <a:defRPr sz="1300">
+                <a:solidFill>
+                  <a:srgbClr val="2B4660"/>
+                </a:solidFill>
+              </a:defRPr>
+            </a:pPr>
+            <a:r>
+              <a:t>Integrated Claude + MCP into live pipelines (-40% dev time)</a:t>
+            </a:r>
+          </a:p>
+          <a:p>
+            <a:pPr>
+              <a:spcBef>
+                <a:spcPts val="400"/>
+              </a:spcBef>
+              <a:defRPr sz="1300">
+                <a:solidFill>
+                  <a:srgbClr val="2B4660"/>
+                </a:solidFill>
+              </a:defRPr>
+            </a:pPr>
+            <a:r>
+              <a:t>10 modular pipelines deployed across 7 sites in DE/FR/ES</a:t>
+            </a:r>
+          </a:p>
+        </p:txBody>
+      </p:sp>
+      <p:sp>
+        <p:nvSpPr>
+          <p:cNvPr id="6" name="TextBox 5"/>
+          <p:cNvSpPr txBox="1"/>
+          <p:nvPr/>
+        </p:nvSpPr>
+        <p:spPr>
+          <a:xfrm>
+            <a:off x="731520" y="5303520"/>
+            <a:ext cx="10515600" cy="457200"/>
+          </a:xfrm>
+          <a:prstGeom prst="rect">
+            <a:avLst/>
+          </a:prstGeom>
+          <a:noFill/>
+        </p:spPr>
+        <p:txBody>
+          <a:bodyPr wrap="square">
+            <a:spAutoFit/>
+          </a:bodyPr>
+          <a:lstStyle/>
+          <a:p>
+            <a:pPr algn="ctr">
+              <a:defRPr sz="1400" b="1">
+                <a:solidFill>
+                  <a:srgbClr val="107ACA"/>
+                </a:solidFill>
+              </a:defRPr>
+            </a:pPr>
+            <a:r>
+              <a:t>I applied my PBW research to medical underwriting -- and built the proof in 48 hours.</a:t>
             </a:r>
           </a:p>
         </p:txBody>
@@ -5331,8 +3777,8 @@
         </p:nvSpPr>
         <p:spPr>
           <a:xfrm>
-            <a:off x="731520" y="457200"/>
-            <a:ext cx="10058400" cy="731520"/>
+            <a:off x="731520" y="365760"/>
+            <a:ext cx="10515600" cy="731520"/>
           </a:xfrm>
           <a:prstGeom prst="rect">
             <a:avLst/>
@@ -5346,14 +3792,14 @@
           <a:lstStyle/>
           <a:p>
             <a:pPr algn="l">
-              <a:defRPr sz="3200" b="1">
+              <a:defRPr sz="2800" b="1">
                 <a:solidFill>
                   <a:srgbClr val="0D2339"/>
                 </a:solidFill>
               </a:defRPr>
             </a:pPr>
             <a:r>
-              <a:t>The Problem: Plausible-but-Wrong</a:t>
+              <a:t>Underwriting models are confidently wrong when data quality is poor</a:t>
             </a:r>
           </a:p>
         </p:txBody>
@@ -5366,8 +3812,8 @@
         </p:nvSpPr>
         <p:spPr>
           <a:xfrm>
-            <a:off x="731520" y="1463040"/>
-            <a:ext cx="10058400" cy="914400"/>
+            <a:off x="731520" y="1188720"/>
+            <a:ext cx="10515600" cy="457200"/>
           </a:xfrm>
           <a:prstGeom prst="rect">
             <a:avLst/>
@@ -5381,14 +3827,49 @@
           <a:lstStyle/>
           <a:p>
             <a:pPr algn="l">
-              <a:defRPr sz="1600" b="0">
-                <a:solidFill>
-                  <a:srgbClr val="2B4660"/>
-                </a:solidFill>
-              </a:defRPr>
-            </a:pPr>
-            <a:r>
-              <a:t>Automated underwriting models produce confident predictions even when input data is incomplete. These predictions pass standard validation but lead to mispriced policies.</a:t>
+              <a:defRPr sz="1400" b="0">
+                <a:solidFill>
+                  <a:srgbClr val="107ACA"/>
+                </a:solidFill>
+              </a:defRPr>
+            </a:pPr>
+            <a:r>
+              <a:t>I found the same failure mode in genomics AI -- and it applies directly to insurance</a:t>
+            </a:r>
+          </a:p>
+        </p:txBody>
+      </p:sp>
+      <p:sp>
+        <p:nvSpPr>
+          <p:cNvPr id="4" name="TextBox 3"/>
+          <p:cNvSpPr txBox="1"/>
+          <p:nvPr/>
+        </p:nvSpPr>
+        <p:spPr>
+          <a:xfrm>
+            <a:off x="731520" y="2011680"/>
+            <a:ext cx="5029200" cy="365760"/>
+          </a:xfrm>
+          <a:prstGeom prst="rect">
+            <a:avLst/>
+          </a:prstGeom>
+          <a:noFill/>
+        </p:spPr>
+        <p:txBody>
+          <a:bodyPr wrap="square">
+            <a:spAutoFit/>
+          </a:bodyPr>
+          <a:lstStyle/>
+          <a:p>
+            <a:pPr algn="l">
+              <a:defRPr sz="1600" b="1">
+                <a:solidFill>
+                  <a:srgbClr val="0D2339"/>
+                </a:solidFill>
+              </a:defRPr>
+            </a:pPr>
+            <a:r>
+              <a:t>The failure mode</a:t>
             </a:r>
           </a:p>
           <a:p>
@@ -5396,14 +3877,14 @@
               <a:spcBef>
                 <a:spcPts val="400"/>
               </a:spcBef>
-              <a:defRPr sz="1400">
+              <a:defRPr sz="1300">
                 <a:solidFill>
                   <a:srgbClr val="2B4660"/>
                 </a:solidFill>
               </a:defRPr>
             </a:pPr>
             <a:r>
-              <a:t>A 2% PBW rate across 100,000 policies = 2,000 mispriced decisions per year</a:t>
+              <a:t>Model scores patient as '78% high risk' based on 3 diagnoses, no labs</a:t>
             </a:r>
           </a:p>
           <a:p>
@@ -5411,14 +3892,14 @@
               <a:spcBef>
                 <a:spcPts val="400"/>
               </a:spcBef>
-              <a:defRPr sz="1400">
+              <a:defRPr sz="1300">
                 <a:solidFill>
                   <a:srgbClr val="2B4660"/>
                 </a:solidFill>
               </a:defRPr>
             </a:pPr>
             <a:r>
-              <a:t>Standard metrics (AUC, accuracy) do not detect PBW -- the prediction looks correct</a:t>
+              <a:t>Score looks right -- passes every sanity check</a:t>
             </a:r>
           </a:p>
           <a:p>
@@ -5426,14 +3907,124 @@
               <a:spcBef>
                 <a:spcPts val="400"/>
               </a:spcBef>
-              <a:defRPr sz="1400">
+              <a:defRPr sz="1300">
                 <a:solidFill>
                   <a:srgbClr val="2B4660"/>
                 </a:solidFill>
               </a:defRPr>
             </a:pPr>
             <a:r>
-              <a:t>EU AI Act 2024 requires reliability assessment for high-risk AI in insurance (Art. 14, 15)</a:t>
+              <a:t>But it's echoing training data averages, not this patient's reality</a:t>
+            </a:r>
+          </a:p>
+          <a:p>
+            <a:pPr>
+              <a:spcBef>
+                <a:spcPts val="400"/>
+              </a:spcBef>
+              <a:defRPr sz="1300">
+                <a:solidFill>
+                  <a:srgbClr val="2B4660"/>
+                </a:solidFill>
+              </a:defRPr>
+            </a:pPr>
+            <a:r>
+              <a:t>I call this 'Plausible but Wrong' (ISME Communications 2024)</a:t>
+            </a:r>
+          </a:p>
+        </p:txBody>
+      </p:sp>
+      <p:sp>
+        <p:nvSpPr>
+          <p:cNvPr id="5" name="TextBox 4"/>
+          <p:cNvSpPr txBox="1"/>
+          <p:nvPr/>
+        </p:nvSpPr>
+        <p:spPr>
+          <a:xfrm>
+            <a:off x="6217920" y="2011680"/>
+            <a:ext cx="5029200" cy="365760"/>
+          </a:xfrm>
+          <a:prstGeom prst="rect">
+            <a:avLst/>
+          </a:prstGeom>
+          <a:noFill/>
+        </p:spPr>
+        <p:txBody>
+          <a:bodyPr wrap="square">
+            <a:spAutoFit/>
+          </a:bodyPr>
+          <a:lstStyle/>
+          <a:p>
+            <a:pPr algn="l">
+              <a:defRPr sz="1600" b="1">
+                <a:solidFill>
+                  <a:srgbClr val="0D2339"/>
+                </a:solidFill>
+              </a:defRPr>
+            </a:pPr>
+            <a:r>
+              <a:t>At portfolio scale</a:t>
+            </a:r>
+          </a:p>
+          <a:p>
+            <a:pPr>
+              <a:spcBef>
+                <a:spcPts val="400"/>
+              </a:spcBef>
+              <a:defRPr sz="1300">
+                <a:solidFill>
+                  <a:srgbClr val="2B4660"/>
+                </a:solidFill>
+              </a:defRPr>
+            </a:pPr>
+            <a:r>
+              <a:t>100,000 decisions/year x 2% PBW = 2,000 mispriced policies</a:t>
+            </a:r>
+          </a:p>
+          <a:p>
+            <a:pPr>
+              <a:spcBef>
+                <a:spcPts val="400"/>
+              </a:spcBef>
+              <a:defRPr sz="1300">
+                <a:solidFill>
+                  <a:srgbClr val="2B4660"/>
+                </a:solidFill>
+              </a:defRPr>
+            </a:pPr>
+            <a:r>
+              <a:t>Invisible in standard metrics (AUC, Brier score look fine)</a:t>
+            </a:r>
+          </a:p>
+          <a:p>
+            <a:pPr>
+              <a:spcBef>
+                <a:spcPts val="400"/>
+              </a:spcBef>
+              <a:defRPr sz="1300">
+                <a:solidFill>
+                  <a:srgbClr val="2B4660"/>
+                </a:solidFill>
+              </a:defRPr>
+            </a:pPr>
+            <a:r>
+              <a:t>EU AI Act 2024: Art. 14+15 require per-case reliability</a:t>
+            </a:r>
+          </a:p>
+          <a:p>
+            <a:pPr>
+              <a:spcBef>
+                <a:spcPts val="400"/>
+              </a:spcBef>
+              <a:defRPr sz="1300">
+                <a:solidFill>
+                  <a:srgbClr val="2B4660"/>
+                </a:solidFill>
+              </a:defRPr>
+            </a:pPr>
+            <a:r>
+              <a:t>No production system today validates this at individual level</a:t>
             </a:r>
           </a:p>
         </p:txBody>
@@ -5464,8 +4055,8 @@
         </p:nvSpPr>
         <p:spPr>
           <a:xfrm>
-            <a:off x="731520" y="457200"/>
-            <a:ext cx="10058400" cy="731520"/>
+            <a:off x="731520" y="365760"/>
+            <a:ext cx="10515600" cy="731520"/>
           </a:xfrm>
           <a:prstGeom prst="rect">
             <a:avLst/>
@@ -5479,14 +4070,14 @@
           <a:lstStyle/>
           <a:p>
             <a:pPr algn="l">
-              <a:defRPr sz="3200" b="1">
+              <a:defRPr sz="2800" b="1">
                 <a:solidFill>
                   <a:srgbClr val="0D2339"/>
                 </a:solidFill>
               </a:defRPr>
             </a:pPr>
             <a:r>
-              <a:t>The Solution: DQS + Reliability Head</a:t>
+              <a:t>I built a working underwriting system in 48 hours to show you what's possible</a:t>
             </a:r>
           </a:p>
         </p:txBody>
@@ -5499,8 +4090,8 @@
         </p:nvSpPr>
         <p:spPr>
           <a:xfrm>
-            <a:off x="731520" y="1463040"/>
-            <a:ext cx="10058400" cy="457200"/>
+            <a:off x="731520" y="1188720"/>
+            <a:ext cx="10515600" cy="457200"/>
           </a:xfrm>
           <a:prstGeom prst="rect">
             <a:avLst/>
@@ -5514,14 +4105,103 @@
           <a:lstStyle/>
           <a:p>
             <a:pPr algn="l">
-              <a:defRPr sz="1600" b="0">
-                <a:solidFill>
-                  <a:srgbClr val="2B4660"/>
-                </a:solidFill>
-              </a:defRPr>
-            </a:pPr>
-            <a:r>
-              <a:t>A reliability layer on top of risk prediction:</a:t>
+              <a:defRPr sz="1400" b="0">
+                <a:solidFill>
+                  <a:srgbClr val="107ACA"/>
+                </a:solidFill>
+              </a:defRPr>
+            </a:pPr>
+            <a:r>
+              <a:t>Not a slide deck -- a running application with 231 tests and every number verified against PubMed</a:t>
+            </a:r>
+          </a:p>
+        </p:txBody>
+      </p:sp>
+      <p:sp>
+        <p:nvSpPr>
+          <p:cNvPr id="4" name="Rectangle 3"/>
+          <p:cNvSpPr/>
+          <p:nvPr/>
+        </p:nvSpPr>
+        <p:spPr>
+          <a:xfrm>
+            <a:off x="731520" y="2011680"/>
+            <a:ext cx="10515600" cy="1097280"/>
+          </a:xfrm>
+          <a:prstGeom prst="rect">
+            <a:avLst/>
+          </a:prstGeom>
+          <a:solidFill>
+            <a:srgbClr val="EEF2F7"/>
+          </a:solidFill>
+          <a:ln>
+            <a:solidFill>
+              <a:srgbClr val="C4CDD6"/>
+            </a:solidFill>
+          </a:ln>
+        </p:spPr>
+        <p:style>
+          <a:lnRef idx="1">
+            <a:schemeClr val="accent1"/>
+          </a:lnRef>
+          <a:fillRef idx="3">
+            <a:schemeClr val="accent1"/>
+          </a:fillRef>
+          <a:effectRef idx="2">
+            <a:schemeClr val="accent1"/>
+          </a:effectRef>
+          <a:fontRef idx="minor">
+            <a:schemeClr val="lt1"/>
+          </a:fontRef>
+        </p:style>
+        <p:txBody>
+          <a:bodyPr rtlCol="0" anchor="ctr" wrap="square"/>
+          <a:lstStyle/>
+          <a:p>
+            <a:pPr algn="ctr">
+              <a:defRPr sz="1400" b="1">
+                <a:solidFill>
+                  <a:srgbClr val="0D2339"/>
+                </a:solidFill>
+              </a:defRPr>
+            </a:pPr>
+            <a:r>
+              <a:t>Patient Record  --&gt;  Data Quality Score  --&gt;  Right Model for This Data  --&gt;  P(wrong)  --&gt;  Accept / Review / Reject</a:t>
+            </a:r>
+          </a:p>
+        </p:txBody>
+      </p:sp>
+      <p:sp>
+        <p:nvSpPr>
+          <p:cNvPr id="5" name="TextBox 4"/>
+          <p:cNvSpPr txBox="1"/>
+          <p:nvPr/>
+        </p:nvSpPr>
+        <p:spPr>
+          <a:xfrm>
+            <a:off x="731520" y="3657600"/>
+            <a:ext cx="5029200" cy="365760"/>
+          </a:xfrm>
+          <a:prstGeom prst="rect">
+            <a:avLst/>
+          </a:prstGeom>
+          <a:noFill/>
+        </p:spPr>
+        <p:txBody>
+          <a:bodyPr wrap="square">
+            <a:spAutoFit/>
+          </a:bodyPr>
+          <a:lstStyle/>
+          <a:p>
+            <a:pPr algn="l">
+              <a:defRPr sz="1500" b="1">
+                <a:solidFill>
+                  <a:srgbClr val="0D2339"/>
+                </a:solidFill>
+              </a:defRPr>
+            </a:pPr>
+            <a:r>
+              <a:t>What it does</a:t>
             </a:r>
           </a:p>
           <a:p>
@@ -5529,14 +4209,14 @@
               <a:spcBef>
                 <a:spcPts val="400"/>
               </a:spcBef>
-              <a:defRPr sz="1400">
+              <a:defRPr sz="1300">
                 <a:solidFill>
                   <a:srgbClr val="2B4660"/>
                 </a:solidFill>
               </a:defRPr>
             </a:pPr>
             <a:r>
-              <a:t>Data Quality Score (DQS): 0.40 x completeness + 0.35 x consistency + 0.25 x recency</a:t>
+              <a:t>Scores data quality BEFORE the model runs</a:t>
             </a:r>
           </a:p>
           <a:p>
@@ -5544,14 +4224,14 @@
               <a:spcBef>
                 <a:spcPts val="400"/>
               </a:spcBef>
-              <a:defRPr sz="1400">
+              <a:defRPr sz="1300">
                 <a:solidFill>
                   <a:srgbClr val="2B4660"/>
                 </a:solidFill>
               </a:defRPr>
             </a:pPr>
             <a:r>
-              <a:t>Data Profile: FULL / NO_LABS / NO_MEDS / MINIMAL -- one model per profile, no imputation</a:t>
+              <a:t>Routes to the right model for available data (no imputation)</a:t>
             </a:r>
           </a:p>
           <a:p>
@@ -5559,14 +4239,49 @@
               <a:spcBef>
                 <a:spcPts val="400"/>
               </a:spcBef>
-              <a:defRPr sz="1400">
+              <a:defRPr sz="1300">
                 <a:solidFill>
                   <a:srgbClr val="2B4660"/>
                 </a:solidFill>
               </a:defRPr>
             </a:pPr>
             <a:r>
-              <a:t>Reliability Head: learned P(wrong) with cost-optimal accept / review / reject decisions</a:t>
+              <a:t>Estimates P(wrong) and makes cost-optimal decisions</a:t>
+            </a:r>
+          </a:p>
+        </p:txBody>
+      </p:sp>
+      <p:sp>
+        <p:nvSpPr>
+          <p:cNvPr id="6" name="TextBox 5"/>
+          <p:cNvSpPr txBox="1"/>
+          <p:nvPr/>
+        </p:nvSpPr>
+        <p:spPr>
+          <a:xfrm>
+            <a:off x="6217920" y="3657600"/>
+            <a:ext cx="5029200" cy="365760"/>
+          </a:xfrm>
+          <a:prstGeom prst="rect">
+            <a:avLst/>
+          </a:prstGeom>
+          <a:noFill/>
+        </p:spPr>
+        <p:txBody>
+          <a:bodyPr wrap="square">
+            <a:spAutoFit/>
+          </a:bodyPr>
+          <a:lstStyle/>
+          <a:p>
+            <a:pPr algn="l">
+              <a:defRPr sz="1500" b="1">
+                <a:solidFill>
+                  <a:srgbClr val="0D2339"/>
+                </a:solidFill>
+              </a:defRPr>
+            </a:pPr>
+            <a:r>
+              <a:t>How I built it</a:t>
             </a:r>
           </a:p>
           <a:p>
@@ -5574,14 +4289,44 @@
               <a:spcBef>
                 <a:spcPts val="400"/>
               </a:spcBef>
-              <a:defRPr sz="1400">
+              <a:defRPr sz="1300">
                 <a:solidFill>
                   <a:srgbClr val="2B4660"/>
                 </a:solidFill>
               </a:defRPr>
             </a:pPr>
             <a:r>
-              <a:t>JSON Lines audit trail for every decision (EU AI Act Art. 14 compliance)</a:t>
+              <a:t>Claude as co-pilot for architecture, coding, and testing</a:t>
+            </a:r>
+          </a:p>
+          <a:p>
+            <a:pPr>
+              <a:spcBef>
+                <a:spcPts val="400"/>
+              </a:spcBef>
+              <a:defRPr sz="1300">
+                <a:solidFill>
+                  <a:srgbClr val="2B4660"/>
+                </a:solidFill>
+              </a:defRPr>
+            </a:pPr>
+            <a:r>
+              <a:t>LLM agents for PubMed literature verification</a:t>
+            </a:r>
+          </a:p>
+          <a:p>
+            <a:pPr>
+              <a:spcBef>
+                <a:spcPts val="400"/>
+              </a:spcBef>
+              <a:defRPr sz="1300">
+                <a:solidFill>
+                  <a:srgbClr val="2B4660"/>
+                </a:solidFill>
+              </a:defRPr>
+            </a:pPr>
+            <a:r>
+              <a:t>Same AI workflow I'd use at Allianz -- but with real data</a:t>
             </a:r>
           </a:p>
         </p:txBody>
@@ -5612,8 +4357,8 @@
         </p:nvSpPr>
         <p:spPr>
           <a:xfrm>
-            <a:off x="731520" y="457200"/>
-            <a:ext cx="10058400" cy="731520"/>
+            <a:off x="731520" y="365760"/>
+            <a:ext cx="10515600" cy="731520"/>
           </a:xfrm>
           <a:prstGeom prst="rect">
             <a:avLst/>
@@ -5627,94 +4372,28 @@
           <a:lstStyle/>
           <a:p>
             <a:pPr algn="l">
-              <a:defRPr sz="3200" b="1">
+              <a:defRPr sz="2800" b="1">
                 <a:solidFill>
                   <a:srgbClr val="0D2339"/>
                 </a:solidFill>
               </a:defRPr>
             </a:pPr>
             <a:r>
-              <a:t>v2 Pipeline Architecture</a:t>
-            </a:r>
-          </a:p>
-        </p:txBody>
-      </p:sp>
-      <p:sp>
-        <p:nvSpPr>
-          <p:cNvPr id="3" name="Rectangle 2"/>
-          <p:cNvSpPr/>
-          <p:nvPr/>
-        </p:nvSpPr>
-        <p:spPr>
-          <a:xfrm>
-            <a:off x="731520" y="1828800"/>
-            <a:ext cx="10515600" cy="1371600"/>
-          </a:xfrm>
-          <a:prstGeom prst="rect">
-            <a:avLst/>
-          </a:prstGeom>
-          <a:solidFill>
-            <a:srgbClr val="EEF2F7"/>
-          </a:solidFill>
-          <a:ln>
-            <a:solidFill>
-              <a:srgbClr val="C4CDD6"/>
-            </a:solidFill>
-          </a:ln>
-        </p:spPr>
-        <p:style>
-          <a:lnRef idx="1">
-            <a:schemeClr val="accent1"/>
-          </a:lnRef>
-          <a:fillRef idx="3">
-            <a:schemeClr val="accent1"/>
-          </a:fillRef>
-          <a:effectRef idx="2">
-            <a:schemeClr val="accent1"/>
-          </a:effectRef>
-          <a:fontRef idx="minor">
-            <a:schemeClr val="lt1"/>
-          </a:fontRef>
-        </p:style>
-        <p:txBody>
-          <a:bodyPr rtlCol="0" anchor="ctr" wrap="square"/>
-          <a:lstStyle/>
-          <a:p>
-            <a:pPr algn="ctr">
-              <a:defRPr sz="1400" b="1">
-                <a:solidFill>
-                  <a:srgbClr val="0D2339"/>
-                </a:solidFill>
-              </a:defRPr>
-            </a:pPr>
-            <a:r>
-              <a:t>Patient Record  --&gt;  Data Profile  --&gt;  DQS v2  --&gt;  Model Router  --&gt;  Reliability Head  --&gt;  Decision + Audit</a:t>
-            </a:r>
-          </a:p>
-          <a:p>
-            <a:pPr algn="ctr">
-              <a:defRPr sz="1000">
-                <a:solidFill>
-                  <a:srgbClr val="61788E"/>
-                </a:solidFill>
-              </a:defRPr>
-            </a:pPr>
-            <a:r>
-              <a:t>what data available?       how good?        right model         P(wrong) + cost-optimal      accept/review/reject</a:t>
-            </a:r>
-          </a:p>
-        </p:txBody>
-      </p:sp>
-      <p:sp>
-        <p:nvSpPr>
-          <p:cNvPr id="4" name="TextBox 3"/>
+              <a:t>International markets show 2.4x higher mispricing risk than Germany</a:t>
+            </a:r>
+          </a:p>
+        </p:txBody>
+      </p:sp>
+      <p:sp>
+        <p:nvSpPr>
+          <p:cNvPr id="3" name="TextBox 2"/>
           <p:cNvSpPr txBox="1"/>
           <p:nvPr/>
         </p:nvSpPr>
         <p:spPr>
           <a:xfrm>
-            <a:off x="731520" y="3657600"/>
-            <a:ext cx="10058400" cy="457200"/>
+            <a:off x="731520" y="1188720"/>
+            <a:ext cx="10515600" cy="457200"/>
           </a:xfrm>
           <a:prstGeom prst="rect">
             <a:avLst/>
@@ -5730,142 +4409,12 @@
             <a:pPr algn="l">
               <a:defRPr sz="1400" b="0">
                 <a:solidFill>
-                  <a:srgbClr val="2B4660"/>
-                </a:solidFill>
-              </a:defRPr>
-            </a:pPr>
-          </a:p>
-          <a:p>
-            <a:pPr>
-              <a:spcBef>
-                <a:spcPts val="400"/>
-              </a:spcBef>
-              <a:defRPr sz="1400">
-                <a:solidFill>
-                  <a:srgbClr val="2B4660"/>
-                </a:solidFill>
-              </a:defRPr>
-            </a:pPr>
-            <a:r>
-              <a:t>No imputation: each data profile gets its own XGBoost model</a:t>
-            </a:r>
-          </a:p>
-          <a:p>
-            <a:pPr>
-              <a:spcBef>
-                <a:spcPts val="400"/>
-              </a:spcBef>
-              <a:defRPr sz="1400">
-                <a:solidFill>
-                  <a:srgbClr val="2B4660"/>
-                </a:solidFill>
-              </a:defRPr>
-            </a:pPr>
-            <a:r>
-              <a:t>Human override support with reason codes and audit linkage</a:t>
-            </a:r>
-          </a:p>
-          <a:p>
-            <a:pPr>
-              <a:spcBef>
-                <a:spcPts val="400"/>
-              </a:spcBef>
-              <a:defRPr sz="1400">
-                <a:solidFill>
-                  <a:srgbClr val="2B4660"/>
-                </a:solidFill>
-              </a:defRPr>
-            </a:pPr>
-            <a:r>
-              <a:t>Governance: JSON Lines audit trail, shift detection (PSI/JS divergence)</a:t>
-            </a:r>
-          </a:p>
-        </p:txBody>
-      </p:sp>
-    </p:spTree>
-  </p:cSld>
-  <p:clrMapOvr>
-    <a:masterClrMapping/>
-  </p:clrMapOvr>
-</p:sld>
-</file>
-
-<file path=ppt/slides/slide6.xml><?xml version="1.0" encoding="utf-8"?>
-<p:sld xmlns:a="http://schemas.openxmlformats.org/drawingml/2006/main" xmlns:p="http://schemas.openxmlformats.org/presentationml/2006/main" xmlns:r="http://schemas.openxmlformats.org/officeDocument/2006/relationships">
-  <p:cSld>
-    <p:spTree>
-      <p:nvGrpSpPr>
-        <p:cNvPr id="1" name=""/>
-        <p:cNvGrpSpPr/>
-        <p:nvPr/>
-      </p:nvGrpSpPr>
-      <p:grpSpPr/>
-      <p:sp>
-        <p:nvSpPr>
-          <p:cNvPr id="2" name="TextBox 1"/>
-          <p:cNvSpPr txBox="1"/>
-          <p:nvPr/>
-        </p:nvSpPr>
-        <p:spPr>
-          <a:xfrm>
-            <a:off x="731520" y="457200"/>
-            <a:ext cx="10058400" cy="731520"/>
-          </a:xfrm>
-          <a:prstGeom prst="rect">
-            <a:avLst/>
-          </a:prstGeom>
-          <a:noFill/>
-        </p:spPr>
-        <p:txBody>
-          <a:bodyPr wrap="square">
-            <a:spAutoFit/>
-          </a:bodyPr>
-          <a:lstStyle/>
-          <a:p>
-            <a:pPr algn="l">
-              <a:defRPr sz="3200" b="1">
-                <a:solidFill>
-                  <a:srgbClr val="0D2339"/>
-                </a:solidFill>
-              </a:defRPr>
-            </a:pPr>
-            <a:r>
-              <a:t>Multi-Market Validation</a:t>
-            </a:r>
-          </a:p>
-        </p:txBody>
-      </p:sp>
-      <p:sp>
-        <p:nvSpPr>
-          <p:cNvPr id="3" name="TextBox 2"/>
-          <p:cNvSpPr txBox="1"/>
-          <p:nvPr/>
-        </p:nvSpPr>
-        <p:spPr>
-          <a:xfrm>
-            <a:off x="731520" y="1371600"/>
-            <a:ext cx="10058400" cy="548640"/>
-          </a:xfrm>
-          <a:prstGeom prst="rect">
-            <a:avLst/>
-          </a:prstGeom>
-          <a:noFill/>
-        </p:spPr>
-        <p:txBody>
-          <a:bodyPr wrap="square">
-            <a:spAutoFit/>
-          </a:bodyPr>
-          <a:lstStyle/>
-          <a:p>
-            <a:pPr algn="l">
-              <a:defRPr sz="1600" b="0">
-                <a:solidFill>
-                  <a:srgbClr val="2B4660"/>
-                </a:solidFill>
-              </a:defRPr>
-            </a:pPr>
-            <a:r>
-              <a:t>4 European markets with controlled data quality degradation:</a:t>
+                  <a:srgbClr val="107ACA"/>
+                </a:solidFill>
+              </a:defRPr>
+            </a:pPr>
+            <a:r>
+              <a:t>4 European markets, controlled data quality degradation -- the same 3 countries I worked in for genomics</a:t>
             </a:r>
           </a:p>
         </p:txBody>
@@ -5879,8 +4428,8 @@
           <p:nvPr/>
         </p:nvGraphicFramePr>
         <p:xfrm>
-          <a:off x="1371600" y="2286000"/>
-          <a:ext cx="9144000" cy="2286000"/>
+          <a:off x="1371600" y="2103120"/>
+          <a:ext cx="9144000" cy="2011680"/>
         </p:xfrm>
         <a:graphic>
           <a:graphicData uri="http://schemas.openxmlformats.org/drawingml/2006/table">
@@ -5889,13 +4438,12 @@
                 <a:tableStyleId>{5C22544A-7EE6-4342-B048-85BDC9FD1C3A}</a:tableStyleId>
               </a:tblPr>
               <a:tblGrid>
-                <a:gridCol w="1828800"/>
-                <a:gridCol w="1828800"/>
-                <a:gridCol w="1828800"/>
-                <a:gridCol w="1828800"/>
-                <a:gridCol w="1828800"/>
+                <a:gridCol w="2286000"/>
+                <a:gridCol w="2286000"/>
+                <a:gridCol w="2286000"/>
+                <a:gridCol w="2286000"/>
               </a:tblGrid>
-              <a:tr h="457200">
+              <a:tr h="402336">
                 <a:tc>
                   <a:txBody>
                     <a:bodyPr/>
@@ -5932,30 +4480,7 @@
                         </a:defRPr>
                       </a:pPr>
                       <a:r>
-                        <a:t>Coding Completeness</a:t>
-                      </a:r>
-                    </a:p>
-                  </a:txBody>
-                  <a:tcPr>
-                    <a:solidFill>
-                      <a:srgbClr val="0D2339"/>
-                    </a:solidFill>
-                  </a:tcPr>
-                </a:tc>
-                <a:tc>
-                  <a:txBody>
-                    <a:bodyPr/>
-                    <a:lstStyle/>
-                    <a:p>
-                      <a:pPr algn="ctr">
-                        <a:defRPr sz="1200" b="1">
-                          <a:solidFill>
-                            <a:srgbClr val="FFFFFF"/>
-                          </a:solidFill>
-                        </a:defRPr>
-                      </a:pPr>
-                      <a:r>
-                        <a:t>Lab Completeness</a:t>
+                        <a:t>Data Quality</a:t>
                       </a:r>
                     </a:p>
                   </a:txBody>
@@ -6001,7 +4526,7 @@
                         </a:defRPr>
                       </a:pPr>
                       <a:r>
-                        <a:t>PBW Rate</a:t>
+                        <a:t>PBW Flag Rate</a:t>
                       </a:r>
                     </a:p>
                   </a:txBody>
@@ -6012,7 +4537,7 @@
                   </a:tcPr>
                 </a:tc>
               </a:tr>
-              <a:tr h="457200">
+              <a:tr h="402336">
                 <a:tc>
                   <a:txBody>
                     <a:bodyPr/>
@@ -6045,26 +4570,7 @@
                         </a:defRPr>
                       </a:pPr>
                       <a:r>
-                        <a:t>95%</a:t>
-                      </a:r>
-                    </a:p>
-                  </a:txBody>
-                  <a:tcPr/>
-                </a:tc>
-                <a:tc>
-                  <a:txBody>
-                    <a:bodyPr/>
-                    <a:lstStyle/>
-                    <a:p>
-                      <a:pPr algn="ctr">
-                        <a:defRPr sz="1100">
-                          <a:solidFill>
-                            <a:srgbClr val="2B4660"/>
-                          </a:solidFill>
-                        </a:defRPr>
-                      </a:pPr>
-                      <a:r>
-                        <a:t>92%</a:t>
+                        <a:t>High (95% coding, 92% labs)</a:t>
                       </a:r>
                     </a:p>
                   </a:txBody>
@@ -6109,7 +4615,7 @@
                   <a:tcPr/>
                 </a:tc>
               </a:tr>
-              <a:tr h="457200">
+              <a:tr h="402336">
                 <a:tc>
                   <a:txBody>
                     <a:bodyPr/>
@@ -6142,26 +4648,7 @@
                         </a:defRPr>
                       </a:pPr>
                       <a:r>
-                        <a:t>90%</a:t>
-                      </a:r>
-                    </a:p>
-                  </a:txBody>
-                  <a:tcPr/>
-                </a:tc>
-                <a:tc>
-                  <a:txBody>
-                    <a:bodyPr/>
-                    <a:lstStyle/>
-                    <a:p>
-                      <a:pPr algn="ctr">
-                        <a:defRPr sz="1100">
-                          <a:solidFill>
-                            <a:srgbClr val="2B4660"/>
-                          </a:solidFill>
-                        </a:defRPr>
-                      </a:pPr>
-                      <a:r>
-                        <a:t>88%</a:t>
+                        <a:t>Good (90% coding, 88% labs)</a:t>
                       </a:r>
                     </a:p>
                   </a:txBody>
@@ -6206,7 +4693,7 @@
                   <a:tcPr/>
                 </a:tc>
               </a:tr>
-              <a:tr h="457200">
+              <a:tr h="402336">
                 <a:tc>
                   <a:txBody>
                     <a:bodyPr/>
@@ -6239,26 +4726,7 @@
                         </a:defRPr>
                       </a:pPr>
                       <a:r>
-                        <a:t>80%</a:t>
-                      </a:r>
-                    </a:p>
-                  </a:txBody>
-                  <a:tcPr/>
-                </a:tc>
-                <a:tc>
-                  <a:txBody>
-                    <a:bodyPr/>
-                    <a:lstStyle/>
-                    <a:p>
-                      <a:pPr algn="ctr">
-                        <a:defRPr sz="1100">
-                          <a:solidFill>
-                            <a:srgbClr val="2B4660"/>
-                          </a:solidFill>
-                        </a:defRPr>
-                      </a:pPr>
-                      <a:r>
-                        <a:t>75%</a:t>
+                        <a:t>Medium (80% coding, 75% labs)</a:t>
                       </a:r>
                     </a:p>
                   </a:txBody>
@@ -6303,7 +4771,7 @@
                   <a:tcPr/>
                 </a:tc>
               </a:tr>
-              <a:tr h="457200">
+              <a:tr h="402336">
                 <a:tc>
                   <a:txBody>
                     <a:bodyPr/>
@@ -6336,26 +4804,7 @@
                         </a:defRPr>
                       </a:pPr>
                       <a:r>
-                        <a:t>60%</a:t>
-                      </a:r>
-                    </a:p>
-                  </a:txBody>
-                  <a:tcPr/>
-                </a:tc>
-                <a:tc>
-                  <a:txBody>
-                    <a:bodyPr/>
-                    <a:lstStyle/>
-                    <a:p>
-                      <a:pPr algn="ctr">
-                        <a:defRPr sz="1100">
-                          <a:solidFill>
-                            <a:srgbClr val="2B4660"/>
-                          </a:solidFill>
-                        </a:defRPr>
-                      </a:pPr>
-                      <a:r>
-                        <a:t>50%</a:t>
+                        <a:t>Low (60% coding, 50% labs)</a:t>
                       </a:r>
                     </a:p>
                   </a:txBody>
@@ -6388,7 +4837,7 @@
                       <a:pPr algn="ctr">
                         <a:defRPr sz="1100">
                           <a:solidFill>
-                            <a:srgbClr val="2B4660"/>
+                            <a:srgbClr val="D00D00"/>
                           </a:solidFill>
                         </a:defRPr>
                       </a:pPr>
@@ -6412,8 +4861,8 @@
         </p:nvSpPr>
         <p:spPr>
           <a:xfrm>
-            <a:off x="731520" y="5029200"/>
-            <a:ext cx="10058400" cy="457200"/>
+            <a:off x="731520" y="4846320"/>
+            <a:ext cx="10515600" cy="457200"/>
           </a:xfrm>
           <a:prstGeom prst="rect">
             <a:avLst/>
@@ -6426,15 +4875,237 @@
           </a:bodyPr>
           <a:lstStyle/>
           <a:p>
+            <a:pPr algn="ctr">
+              <a:defRPr sz="1400" b="1">
+                <a:solidFill>
+                  <a:srgbClr val="107ACA"/>
+                </a:solidFill>
+              </a:defRPr>
+            </a:pPr>
+            <a:r>
+              <a:t>The worst market has 2.4x the mispricing risk -- and standard metrics don't see it.</a:t>
+            </a:r>
+          </a:p>
+        </p:txBody>
+      </p:sp>
+    </p:spTree>
+  </p:cSld>
+  <p:clrMapOvr>
+    <a:masterClrMapping/>
+  </p:clrMapOvr>
+</p:sld>
+</file>
+
+<file path=ppt/slides/slide6.xml><?xml version="1.0" encoding="utf-8"?>
+<p:sld xmlns:a="http://schemas.openxmlformats.org/drawingml/2006/main" xmlns:p="http://schemas.openxmlformats.org/presentationml/2006/main" xmlns:r="http://schemas.openxmlformats.org/officeDocument/2006/relationships">
+  <p:cSld>
+    <p:spTree>
+      <p:nvGrpSpPr>
+        <p:cNvPr id="1" name=""/>
+        <p:cNvGrpSpPr/>
+        <p:nvPr/>
+      </p:nvGrpSpPr>
+      <p:grpSpPr/>
+      <p:sp>
+        <p:nvSpPr>
+          <p:cNvPr id="2" name="TextBox 1"/>
+          <p:cNvSpPr txBox="1"/>
+          <p:nvPr/>
+        </p:nvSpPr>
+        <p:spPr>
+          <a:xfrm>
+            <a:off x="731520" y="365760"/>
+            <a:ext cx="10515600" cy="731520"/>
+          </a:xfrm>
+          <a:prstGeom prst="rect">
+            <a:avLst/>
+          </a:prstGeom>
+          <a:noFill/>
+        </p:spPr>
+        <p:txBody>
+          <a:bodyPr wrap="square">
+            <a:spAutoFit/>
+          </a:bodyPr>
+          <a:lstStyle/>
+          <a:p>
+            <a:pPr algn="l">
+              <a:defRPr sz="2800" b="1">
+                <a:solidFill>
+                  <a:srgbClr val="0D2339"/>
+                </a:solidFill>
+              </a:defRPr>
+            </a:pPr>
+            <a:r>
+              <a:t>I added Alzheimer's disease in one config file to prove the framework generalises</a:t>
+            </a:r>
+          </a:p>
+        </p:txBody>
+      </p:sp>
+      <p:sp>
+        <p:nvSpPr>
+          <p:cNvPr id="3" name="TextBox 2"/>
+          <p:cNvSpPr txBox="1"/>
+          <p:nvPr/>
+        </p:nvSpPr>
+        <p:spPr>
+          <a:xfrm>
+            <a:off x="731520" y="1188720"/>
+            <a:ext cx="10515600" cy="365760"/>
+          </a:xfrm>
+          <a:prstGeom prst="rect">
+            <a:avLst/>
+          </a:prstGeom>
+          <a:noFill/>
+        </p:spPr>
+        <p:txBody>
+          <a:bodyPr wrap="square">
+            <a:spAutoFit/>
+          </a:bodyPr>
+          <a:lstStyle/>
+          <a:p>
+            <a:pPr algn="l">
+              <a:defRPr sz="1400" b="0">
+                <a:solidFill>
+                  <a:srgbClr val="107ACA"/>
+                </a:solidFill>
+              </a:defRPr>
+            </a:pPr>
+            <a:r>
+              <a:t>7 states from normal cognition to death -- all transition rates verified against PubMed systematic reviews</a:t>
+            </a:r>
+          </a:p>
+        </p:txBody>
+      </p:sp>
+      <p:pic>
+        <p:nvPicPr>
+          <p:cNvPr id="4" name="Picture 3" descr="tmpjanybh89.png"/>
+          <p:cNvPicPr>
+            <a:picLocks noChangeAspect="1"/>
+          </p:cNvPicPr>
+          <p:nvPr/>
+        </p:nvPicPr>
+        <p:blipFill>
+          <a:blip r:embed="rId2"/>
+          <a:stretch>
+            <a:fillRect/>
+          </a:stretch>
+        </p:blipFill>
+        <p:spPr>
+          <a:xfrm>
+            <a:off x="914400" y="1828800"/>
+            <a:ext cx="6858000" cy="3840480"/>
+          </a:xfrm>
+          <a:prstGeom prst="rect">
+            <a:avLst/>
+          </a:prstGeom>
+        </p:spPr>
+      </p:pic>
+      <p:sp>
+        <p:nvSpPr>
+          <p:cNvPr id="5" name="TextBox 4"/>
+          <p:cNvSpPr txBox="1"/>
+          <p:nvPr/>
+        </p:nvSpPr>
+        <p:spPr>
+          <a:xfrm>
+            <a:off x="8229600" y="1828800"/>
+            <a:ext cx="3200400" cy="365760"/>
+          </a:xfrm>
+          <a:prstGeom prst="rect">
+            <a:avLst/>
+          </a:prstGeom>
+          <a:noFill/>
+        </p:spPr>
+        <p:txBody>
+          <a:bodyPr wrap="square">
+            <a:spAutoFit/>
+          </a:bodyPr>
+          <a:lstStyle/>
+          <a:p>
             <a:pPr algn="l">
               <a:defRPr sz="1400" b="1">
                 <a:solidFill>
-                  <a:srgbClr val="107ACA"/>
-                </a:solidFill>
-              </a:defRPr>
-            </a:pPr>
-            <a:r>
-              <a:t>INT market has 2.4x the PBW rate of DE -- data quality directly drives prediction reliability.</a:t>
+                  <a:srgbClr val="0D2339"/>
+                </a:solidFill>
+              </a:defRPr>
+            </a:pPr>
+            <a:r>
+              <a:t>Added as config:</a:t>
+            </a:r>
+          </a:p>
+          <a:p>
+            <a:pPr>
+              <a:spcBef>
+                <a:spcPts val="400"/>
+              </a:spcBef>
+              <a:defRPr sz="1200">
+                <a:solidFill>
+                  <a:srgbClr val="2B4660"/>
+                </a:solidFill>
+              </a:defRPr>
+            </a:pPr>
+            <a:r>
+              <a:t>8 ICD-10 codes</a:t>
+            </a:r>
+          </a:p>
+          <a:p>
+            <a:pPr>
+              <a:spcBef>
+                <a:spcPts val="400"/>
+              </a:spcBef>
+              <a:defRPr sz="1200">
+                <a:solidFill>
+                  <a:srgbClr val="2B4660"/>
+                </a:solidFill>
+              </a:defRPr>
+            </a:pPr>
+            <a:r>
+              <a:t>4 biomarkers (MMSE, MoCA, CSF)</a:t>
+            </a:r>
+          </a:p>
+          <a:p>
+            <a:pPr>
+              <a:spcBef>
+                <a:spcPts val="400"/>
+              </a:spcBef>
+              <a:defRPr sz="1200">
+                <a:solidFill>
+                  <a:srgbClr val="2B4660"/>
+                </a:solidFill>
+              </a:defRPr>
+            </a:pPr>
+            <a:r>
+              <a:t>4 medications (ATC-coded)</a:t>
+            </a:r>
+          </a:p>
+          <a:p>
+            <a:pPr>
+              <a:spcBef>
+                <a:spcPts val="400"/>
+              </a:spcBef>
+              <a:defRPr sz="1200">
+                <a:solidFill>
+                  <a:srgbClr val="2B4660"/>
+                </a:solidFill>
+              </a:defRPr>
+            </a:pPr>
+            <a:r>
+              <a:t>ApoE4 risk modifier</a:t>
+            </a:r>
+          </a:p>
+          <a:p>
+            <a:pPr>
+              <a:spcBef>
+                <a:spcPts val="400"/>
+              </a:spcBef>
+              <a:defRPr sz="1200">
+                <a:solidFill>
+                  <a:srgbClr val="028901"/>
+                </a:solidFill>
+              </a:defRPr>
+            </a:pPr>
+            <a:r>
+              <a:t>Zero changes to the engine</a:t>
             </a:r>
           </a:p>
         </p:txBody>
@@ -6465,8 +5136,8 @@
         </p:nvSpPr>
         <p:spPr>
           <a:xfrm>
-            <a:off x="731520" y="457200"/>
-            <a:ext cx="10058400" cy="731520"/>
+            <a:off x="731520" y="365760"/>
+            <a:ext cx="10515600" cy="731520"/>
           </a:xfrm>
           <a:prstGeom prst="rect">
             <a:avLst/>
@@ -6480,28 +5151,540 @@
           <a:lstStyle/>
           <a:p>
             <a:pPr algn="l">
-              <a:defRPr sz="3200" b="1">
+              <a:defRPr sz="2800" b="1">
                 <a:solidFill>
                   <a:srgbClr val="0D2339"/>
                 </a:solidFill>
               </a:defRPr>
             </a:pPr>
             <a:r>
-              <a:t>PBW Detection</a:t>
-            </a:r>
-          </a:p>
-        </p:txBody>
-      </p:sp>
-      <p:sp>
-        <p:nvSpPr>
-          <p:cNvPr id="3" name="TextBox 2"/>
+              <a:t>AI-driven underwriting solves five problems current methods cannot</a:t>
+            </a:r>
+          </a:p>
+        </p:txBody>
+      </p:sp>
+      <p:graphicFrame>
+        <p:nvGraphicFramePr>
+          <p:cNvPr id="3" name="Table 2"/>
+          <p:cNvGraphicFramePr>
+            <a:graphicFrameLocks noGrp="1"/>
+          </p:cNvGraphicFramePr>
+          <p:nvPr/>
+        </p:nvGraphicFramePr>
+        <p:xfrm>
+          <a:off x="731520" y="1371600"/>
+          <a:ext cx="10515600" cy="2560320"/>
+        </p:xfrm>
+        <a:graphic>
+          <a:graphicData uri="http://schemas.openxmlformats.org/drawingml/2006/table">
+            <a:tbl>
+              <a:tblPr firstRow="1" bandRow="1">
+                <a:tableStyleId>{5C22544A-7EE6-4342-B048-85BDC9FD1C3A}</a:tableStyleId>
+              </a:tblPr>
+              <a:tblGrid>
+                <a:gridCol w="2628900"/>
+                <a:gridCol w="2628900"/>
+                <a:gridCol w="2628900"/>
+                <a:gridCol w="2628900"/>
+              </a:tblGrid>
+              <a:tr h="426720">
+                <a:tc>
+                  <a:txBody>
+                    <a:bodyPr/>
+                    <a:lstStyle/>
+                    <a:p>
+                      <a:pPr algn="ctr">
+                        <a:defRPr sz="1100" b="1">
+                          <a:solidFill>
+                            <a:srgbClr val="FFFFFF"/>
+                          </a:solidFill>
+                        </a:defRPr>
+                      </a:pPr>
+                      <a:r>
+                        <a:t>What you need</a:t>
+                      </a:r>
+                    </a:p>
+                  </a:txBody>
+                  <a:tcPr>
+                    <a:solidFill>
+                      <a:srgbClr val="0D2339"/>
+                    </a:solidFill>
+                  </a:tcPr>
+                </a:tc>
+                <a:tc>
+                  <a:txBody>
+                    <a:bodyPr/>
+                    <a:lstStyle/>
+                    <a:p>
+                      <a:pPr algn="ctr">
+                        <a:defRPr sz="1100" b="1">
+                          <a:solidFill>
+                            <a:srgbClr val="FFFFFF"/>
+                          </a:solidFill>
+                        </a:defRPr>
+                      </a:pPr>
+                      <a:r>
+                        <a:t>Rules / Actuarial</a:t>
+                      </a:r>
+                    </a:p>
+                  </a:txBody>
+                  <a:tcPr>
+                    <a:solidFill>
+                      <a:srgbClr val="0D2339"/>
+                    </a:solidFill>
+                  </a:tcPr>
+                </a:tc>
+                <a:tc>
+                  <a:txBody>
+                    <a:bodyPr/>
+                    <a:lstStyle/>
+                    <a:p>
+                      <a:pPr algn="ctr">
+                        <a:defRPr sz="1100" b="1">
+                          <a:solidFill>
+                            <a:srgbClr val="FFFFFF"/>
+                          </a:solidFill>
+                        </a:defRPr>
+                      </a:pPr>
+                      <a:r>
+                        <a:t>Basic ML</a:t>
+                      </a:r>
+                    </a:p>
+                  </a:txBody>
+                  <a:tcPr>
+                    <a:solidFill>
+                      <a:srgbClr val="0D2339"/>
+                    </a:solidFill>
+                  </a:tcPr>
+                </a:tc>
+                <a:tc>
+                  <a:txBody>
+                    <a:bodyPr/>
+                    <a:lstStyle/>
+                    <a:p>
+                      <a:pPr algn="ctr">
+                        <a:defRPr sz="1100" b="1">
+                          <a:solidFill>
+                            <a:srgbClr val="FFFFFF"/>
+                          </a:solidFill>
+                        </a:defRPr>
+                      </a:pPr>
+                      <a:r>
+                        <a:t>What I build</a:t>
+                      </a:r>
+                    </a:p>
+                  </a:txBody>
+                  <a:tcPr>
+                    <a:solidFill>
+                      <a:srgbClr val="0D2339"/>
+                    </a:solidFill>
+                  </a:tcPr>
+                </a:tc>
+              </a:tr>
+              <a:tr h="426720">
+                <a:tc>
+                  <a:txBody>
+                    <a:bodyPr/>
+                    <a:lstStyle/>
+                    <a:p>
+                      <a:pPr algn="ctr">
+                        <a:defRPr sz="1000">
+                          <a:solidFill>
+                            <a:srgbClr val="2B4660"/>
+                          </a:solidFill>
+                        </a:defRPr>
+                      </a:pPr>
+                      <a:r>
+                        <a:t>Know when to trust the AI</a:t>
+                      </a:r>
+                    </a:p>
+                  </a:txBody>
+                  <a:tcPr/>
+                </a:tc>
+                <a:tc>
+                  <a:txBody>
+                    <a:bodyPr/>
+                    <a:lstStyle/>
+                    <a:p>
+                      <a:pPr algn="ctr">
+                        <a:defRPr sz="1000">
+                          <a:solidFill>
+                            <a:srgbClr val="2B4660"/>
+                          </a:solidFill>
+                        </a:defRPr>
+                      </a:pPr>
+                      <a:r>
+                        <a:t>No</a:t>
+                      </a:r>
+                    </a:p>
+                  </a:txBody>
+                  <a:tcPr/>
+                </a:tc>
+                <a:tc>
+                  <a:txBody>
+                    <a:bodyPr/>
+                    <a:lstStyle/>
+                    <a:p>
+                      <a:pPr algn="ctr">
+                        <a:defRPr sz="1000">
+                          <a:solidFill>
+                            <a:srgbClr val="2B4660"/>
+                          </a:solidFill>
+                        </a:defRPr>
+                      </a:pPr>
+                      <a:r>
+                        <a:t>No</a:t>
+                      </a:r>
+                    </a:p>
+                  </a:txBody>
+                  <a:tcPr/>
+                </a:tc>
+                <a:tc>
+                  <a:txBody>
+                    <a:bodyPr/>
+                    <a:lstStyle/>
+                    <a:p>
+                      <a:pPr algn="ctr">
+                        <a:defRPr sz="1000">
+                          <a:solidFill>
+                            <a:srgbClr val="028901"/>
+                          </a:solidFill>
+                        </a:defRPr>
+                      </a:pPr>
+                      <a:r>
+                        <a:t>DQS + P(wrong) per case</a:t>
+                      </a:r>
+                    </a:p>
+                  </a:txBody>
+                  <a:tcPr/>
+                </a:tc>
+              </a:tr>
+              <a:tr h="426720">
+                <a:tc>
+                  <a:txBody>
+                    <a:bodyPr/>
+                    <a:lstStyle/>
+                    <a:p>
+                      <a:pPr algn="ctr">
+                        <a:defRPr sz="1000">
+                          <a:solidFill>
+                            <a:srgbClr val="2B4660"/>
+                          </a:solidFill>
+                        </a:defRPr>
+                      </a:pPr>
+                      <a:r>
+                        <a:t>Handle incomplete records</a:t>
+                      </a:r>
+                    </a:p>
+                  </a:txBody>
+                  <a:tcPr/>
+                </a:tc>
+                <a:tc>
+                  <a:txBody>
+                    <a:bodyPr/>
+                    <a:lstStyle/>
+                    <a:p>
+                      <a:pPr algn="ctr">
+                        <a:defRPr sz="1000">
+                          <a:solidFill>
+                            <a:srgbClr val="2B4660"/>
+                          </a:solidFill>
+                        </a:defRPr>
+                      </a:pPr>
+                      <a:r>
+                        <a:t>Reject</a:t>
+                      </a:r>
+                    </a:p>
+                  </a:txBody>
+                  <a:tcPr/>
+                </a:tc>
+                <a:tc>
+                  <a:txBody>
+                    <a:bodyPr/>
+                    <a:lstStyle/>
+                    <a:p>
+                      <a:pPr algn="ctr">
+                        <a:defRPr sz="1000">
+                          <a:solidFill>
+                            <a:srgbClr val="D00D00"/>
+                          </a:solidFill>
+                        </a:defRPr>
+                      </a:pPr>
+                      <a:r>
+                        <a:t>Impute (creates PBW)</a:t>
+                      </a:r>
+                    </a:p>
+                  </a:txBody>
+                  <a:tcPr/>
+                </a:tc>
+                <a:tc>
+                  <a:txBody>
+                    <a:bodyPr/>
+                    <a:lstStyle/>
+                    <a:p>
+                      <a:pPr algn="ctr">
+                        <a:defRPr sz="1000">
+                          <a:solidFill>
+                            <a:srgbClr val="028901"/>
+                          </a:solidFill>
+                        </a:defRPr>
+                      </a:pPr>
+                      <a:r>
+                        <a:t>Route to right model</a:t>
+                      </a:r>
+                    </a:p>
+                  </a:txBody>
+                  <a:tcPr/>
+                </a:tc>
+              </a:tr>
+              <a:tr h="426720">
+                <a:tc>
+                  <a:txBody>
+                    <a:bodyPr/>
+                    <a:lstStyle/>
+                    <a:p>
+                      <a:pPr algn="ctr">
+                        <a:defRPr sz="1000">
+                          <a:solidFill>
+                            <a:srgbClr val="2B4660"/>
+                          </a:solidFill>
+                        </a:defRPr>
+                      </a:pPr>
+                      <a:r>
+                        <a:t>Explain each decision</a:t>
+                      </a:r>
+                    </a:p>
+                  </a:txBody>
+                  <a:tcPr/>
+                </a:tc>
+                <a:tc>
+                  <a:txBody>
+                    <a:bodyPr/>
+                    <a:lstStyle/>
+                    <a:p>
+                      <a:pPr algn="ctr">
+                        <a:defRPr sz="1000">
+                          <a:solidFill>
+                            <a:srgbClr val="2B4660"/>
+                          </a:solidFill>
+                        </a:defRPr>
+                      </a:pPr>
+                      <a:r>
+                        <a:t>No</a:t>
+                      </a:r>
+                    </a:p>
+                  </a:txBody>
+                  <a:tcPr/>
+                </a:tc>
+                <a:tc>
+                  <a:txBody>
+                    <a:bodyPr/>
+                    <a:lstStyle/>
+                    <a:p>
+                      <a:pPr algn="ctr">
+                        <a:defRPr sz="1000">
+                          <a:solidFill>
+                            <a:srgbClr val="2B4660"/>
+                          </a:solidFill>
+                        </a:defRPr>
+                      </a:pPr>
+                      <a:r>
+                        <a:t>Limited</a:t>
+                      </a:r>
+                    </a:p>
+                  </a:txBody>
+                  <a:tcPr/>
+                </a:tc>
+                <a:tc>
+                  <a:txBody>
+                    <a:bodyPr/>
+                    <a:lstStyle/>
+                    <a:p>
+                      <a:pPr algn="ctr">
+                        <a:defRPr sz="1000">
+                          <a:solidFill>
+                            <a:srgbClr val="028901"/>
+                          </a:solidFill>
+                        </a:defRPr>
+                      </a:pPr>
+                      <a:r>
+                        <a:t>SHAP per patient + audit</a:t>
+                      </a:r>
+                    </a:p>
+                  </a:txBody>
+                  <a:tcPr/>
+                </a:tc>
+              </a:tr>
+              <a:tr h="426720">
+                <a:tc>
+                  <a:txBody>
+                    <a:bodyPr/>
+                    <a:lstStyle/>
+                    <a:p>
+                      <a:pPr algn="ctr">
+                        <a:defRPr sz="1000">
+                          <a:solidFill>
+                            <a:srgbClr val="2B4660"/>
+                          </a:solidFill>
+                        </a:defRPr>
+                      </a:pPr>
+                      <a:r>
+                        <a:t>Model disease progression</a:t>
+                      </a:r>
+                    </a:p>
+                  </a:txBody>
+                  <a:tcPr/>
+                </a:tc>
+                <a:tc>
+                  <a:txBody>
+                    <a:bodyPr/>
+                    <a:lstStyle/>
+                    <a:p>
+                      <a:pPr algn="ctr">
+                        <a:defRPr sz="1000">
+                          <a:solidFill>
+                            <a:srgbClr val="2B4660"/>
+                          </a:solidFill>
+                        </a:defRPr>
+                      </a:pPr>
+                      <a:r>
+                        <a:t>Static tables</a:t>
+                      </a:r>
+                    </a:p>
+                  </a:txBody>
+                  <a:tcPr/>
+                </a:tc>
+                <a:tc>
+                  <a:txBody>
+                    <a:bodyPr/>
+                    <a:lstStyle/>
+                    <a:p>
+                      <a:pPr algn="ctr">
+                        <a:defRPr sz="1000">
+                          <a:solidFill>
+                            <a:srgbClr val="2B4660"/>
+                          </a:solidFill>
+                        </a:defRPr>
+                      </a:pPr>
+                      <a:r>
+                        <a:t>No</a:t>
+                      </a:r>
+                    </a:p>
+                  </a:txBody>
+                  <a:tcPr/>
+                </a:tc>
+                <a:tc>
+                  <a:txBody>
+                    <a:bodyPr/>
+                    <a:lstStyle/>
+                    <a:p>
+                      <a:pPr algn="ctr">
+                        <a:defRPr sz="1000">
+                          <a:solidFill>
+                            <a:srgbClr val="028901"/>
+                          </a:solidFill>
+                        </a:defRPr>
+                      </a:pPr>
+                      <a:r>
+                        <a:t>CTMC for any disease</a:t>
+                      </a:r>
+                    </a:p>
+                  </a:txBody>
+                  <a:tcPr/>
+                </a:tc>
+              </a:tr>
+              <a:tr h="426720">
+                <a:tc>
+                  <a:txBody>
+                    <a:bodyPr/>
+                    <a:lstStyle/>
+                    <a:p>
+                      <a:pPr algn="ctr">
+                        <a:defRPr sz="1000">
+                          <a:solidFill>
+                            <a:srgbClr val="2B4660"/>
+                          </a:solidFill>
+                        </a:defRPr>
+                      </a:pPr>
+                      <a:r>
+                        <a:t>EU AI Act compliance</a:t>
+                      </a:r>
+                    </a:p>
+                  </a:txBody>
+                  <a:tcPr/>
+                </a:tc>
+                <a:tc>
+                  <a:txBody>
+                    <a:bodyPr/>
+                    <a:lstStyle/>
+                    <a:p>
+                      <a:pPr algn="ctr">
+                        <a:defRPr sz="1000">
+                          <a:solidFill>
+                            <a:srgbClr val="2B4660"/>
+                          </a:solidFill>
+                        </a:defRPr>
+                      </a:pPr>
+                      <a:r>
+                        <a:t>Partial</a:t>
+                      </a:r>
+                    </a:p>
+                  </a:txBody>
+                  <a:tcPr/>
+                </a:tc>
+                <a:tc>
+                  <a:txBody>
+                    <a:bodyPr/>
+                    <a:lstStyle/>
+                    <a:p>
+                      <a:pPr algn="ctr">
+                        <a:defRPr sz="1000">
+                          <a:solidFill>
+                            <a:srgbClr val="D00D00"/>
+                          </a:solidFill>
+                        </a:defRPr>
+                      </a:pPr>
+                      <a:r>
+                        <a:t>Difficult</a:t>
+                      </a:r>
+                    </a:p>
+                  </a:txBody>
+                  <a:tcPr/>
+                </a:tc>
+                <a:tc>
+                  <a:txBody>
+                    <a:bodyPr/>
+                    <a:lstStyle/>
+                    <a:p>
+                      <a:pPr algn="ctr">
+                        <a:defRPr sz="1000">
+                          <a:solidFill>
+                            <a:srgbClr val="028901"/>
+                          </a:solidFill>
+                        </a:defRPr>
+                      </a:pPr>
+                      <a:r>
+                        <a:t>Built in from day 1</a:t>
+                      </a:r>
+                    </a:p>
+                  </a:txBody>
+                  <a:tcPr/>
+                </a:tc>
+              </a:tr>
+            </a:tbl>
+          </a:graphicData>
+        </a:graphic>
+      </p:graphicFrame>
+      <p:sp>
+        <p:nvSpPr>
+          <p:cNvPr id="4" name="TextBox 3"/>
           <p:cNvSpPr txBox="1"/>
           <p:nvPr/>
         </p:nvSpPr>
         <p:spPr>
           <a:xfrm>
-            <a:off x="731520" y="1463040"/>
-            <a:ext cx="5029200" cy="914400"/>
+            <a:off x="731520" y="4389120"/>
+            <a:ext cx="10515600" cy="365760"/>
           </a:xfrm>
           <a:prstGeom prst="rect">
             <a:avLst/>
@@ -6515,74 +5698,14 @@
           <a:lstStyle/>
           <a:p>
             <a:pPr algn="l">
-              <a:defRPr sz="1600" b="0">
-                <a:solidFill>
-                  <a:srgbClr val="2B4660"/>
-                </a:solidFill>
-              </a:defRPr>
-            </a:pPr>
-            <a:r>
-              <a:t>High confidence + low data quality = plausible-but-wrong.</a:t>
-            </a:r>
-          </a:p>
-          <a:p>
-            <a:pPr>
-              <a:spcBef>
-                <a:spcPts val="400"/>
-              </a:spcBef>
-              <a:defRPr sz="1400">
-                <a:solidFill>
-                  <a:srgbClr val="2B4660"/>
-                </a:solidFill>
-              </a:defRPr>
-            </a:pPr>
-            <a:r>
-              <a:t>v1: fixed threshold (confidence &gt; 0.80 AND DQS &lt; 0.60)</a:t>
-            </a:r>
-          </a:p>
-          <a:p>
-            <a:pPr>
-              <a:spcBef>
-                <a:spcPts val="400"/>
-              </a:spcBef>
-              <a:defRPr sz="1400">
-                <a:solidFill>
-                  <a:srgbClr val="2B4660"/>
-                </a:solidFill>
-              </a:defRPr>
-            </a:pPr>
-            <a:r>
-              <a:t>v2: Reliability Head learns P(wrong) from validation errors</a:t>
-            </a:r>
-          </a:p>
-          <a:p>
-            <a:pPr>
-              <a:spcBef>
-                <a:spcPts val="400"/>
-              </a:spcBef>
-              <a:defRPr sz="1400">
-                <a:solidFill>
-                  <a:srgbClr val="2B4660"/>
-                </a:solidFill>
-              </a:defRPr>
-            </a:pPr>
-            <a:r>
-              <a:t>Cost-optimal: argmin of expected cost for accept/review/reject</a:t>
-            </a:r>
-          </a:p>
-          <a:p>
-            <a:pPr>
-              <a:spcBef>
-                <a:spcPts val="400"/>
-              </a:spcBef>
-              <a:defRPr sz="1400">
-                <a:solidFill>
-                  <a:srgbClr val="2B4660"/>
-                </a:solidFill>
-              </a:defRPr>
-            </a:pPr>
-            <a:r>
-              <a:t>Per-patient audit: P(wrong), DQS, model used, decision rationale</a:t>
+              <a:defRPr sz="1200" b="0">
+                <a:solidFill>
+                  <a:srgbClr val="61788E"/>
+                </a:solidFill>
+              </a:defRPr>
+            </a:pPr>
+            <a:r>
+              <a:t>Phase 3: LLM agents extract structured data from doctor notes across languages, generate natural language risk explanations, and continuously verify parameters against new literature.</a:t>
             </a:r>
           </a:p>
         </p:txBody>
@@ -6613,8 +5736,8 @@
         </p:nvSpPr>
         <p:spPr>
           <a:xfrm>
-            <a:off x="731520" y="457200"/>
-            <a:ext cx="10058400" cy="731520"/>
+            <a:off x="731520" y="365760"/>
+            <a:ext cx="10515600" cy="731520"/>
           </a:xfrm>
           <a:prstGeom prst="rect">
             <a:avLst/>
@@ -6628,14 +5751,14 @@
           <a:lstStyle/>
           <a:p>
             <a:pPr algn="l">
-              <a:defRPr sz="3200" b="1">
+              <a:defRPr sz="2800" b="1">
                 <a:solidFill>
                   <a:srgbClr val="0D2339"/>
                 </a:solidFill>
               </a:defRPr>
             </a:pPr>
             <a:r>
-              <a:t>Disease Progression: Cardiovascular</a:t>
+              <a:t>This is how I work: one person + Claude = output of a 5-person team</a:t>
             </a:r>
           </a:p>
         </p:txBody>
@@ -6648,8 +5771,8 @@
         </p:nvSpPr>
         <p:spPr>
           <a:xfrm>
-            <a:off x="731520" y="1280160"/>
-            <a:ext cx="10058400" cy="457200"/>
+            <a:off x="731520" y="1188720"/>
+            <a:ext cx="10515600" cy="457200"/>
           </a:xfrm>
           <a:prstGeom prst="rect">
             <a:avLst/>
@@ -6665,40 +5788,626 @@
             <a:pPr algn="l">
               <a:defRPr sz="1400" b="0">
                 <a:solidFill>
-                  <a:srgbClr val="2B4660"/>
-                </a:solidFill>
-              </a:defRPr>
-            </a:pPr>
-            <a:r>
-              <a:t>5-state CTMC: Healthy --&gt; Risk Factors --&gt; Chronic Disease --&gt; Complication --&gt; Major Event</a:t>
-            </a:r>
-          </a:p>
-        </p:txBody>
-      </p:sp>
-      <p:pic>
-        <p:nvPicPr>
-          <p:cNvPr id="4" name="Picture 3" descr="tmp8_4n567y.png"/>
-          <p:cNvPicPr>
-            <a:picLocks noChangeAspect="1"/>
-          </p:cNvPicPr>
+                  <a:srgbClr val="107ACA"/>
+                </a:solidFill>
+              </a:defRPr>
+            </a:pPr>
+            <a:r>
+              <a:t>3 years of Claude evaluation taught me exactly where AI works and where it needs human expertise</a:t>
+            </a:r>
+          </a:p>
+        </p:txBody>
+      </p:sp>
+      <p:sp>
+        <p:nvSpPr>
+          <p:cNvPr id="4" name="Rectangle 3"/>
+          <p:cNvSpPr/>
           <p:nvPr/>
-        </p:nvPicPr>
-        <p:blipFill>
-          <a:blip r:embed="rId2"/>
-          <a:stretch>
-            <a:fillRect/>
-          </a:stretch>
-        </p:blipFill>
-        <p:spPr>
-          <a:xfrm>
-            <a:off x="1371600" y="2011680"/>
-            <a:ext cx="9144000" cy="4114800"/>
+        </p:nvSpPr>
+        <p:spPr>
+          <a:xfrm>
+            <a:off x="731520" y="2103120"/>
+            <a:ext cx="548640" cy="548640"/>
           </a:xfrm>
           <a:prstGeom prst="rect">
             <a:avLst/>
           </a:prstGeom>
-        </p:spPr>
-      </p:pic>
+          <a:solidFill>
+            <a:srgbClr val="107ACA"/>
+          </a:solidFill>
+          <a:ln>
+            <a:noFill/>
+          </a:ln>
+        </p:spPr>
+        <p:style>
+          <a:lnRef idx="1">
+            <a:schemeClr val="accent1"/>
+          </a:lnRef>
+          <a:fillRef idx="3">
+            <a:schemeClr val="accent1"/>
+          </a:fillRef>
+          <a:effectRef idx="2">
+            <a:schemeClr val="accent1"/>
+          </a:effectRef>
+          <a:fontRef idx="minor">
+            <a:schemeClr val="lt1"/>
+          </a:fontRef>
+        </p:style>
+        <p:txBody>
+          <a:bodyPr rtlCol="0" anchor="ctr"/>
+          <a:lstStyle/>
+          <a:p>
+            <a:pPr algn="ctr">
+              <a:defRPr sz="1600" b="1">
+                <a:solidFill>
+                  <a:srgbClr val="FFFFFF"/>
+                </a:solidFill>
+              </a:defRPr>
+            </a:pPr>
+            <a:r>
+              <a:t>1</a:t>
+            </a:r>
+          </a:p>
+        </p:txBody>
+      </p:sp>
+      <p:sp>
+        <p:nvSpPr>
+          <p:cNvPr id="5" name="TextBox 4"/>
+          <p:cNvSpPr txBox="1"/>
+          <p:nvPr/>
+        </p:nvSpPr>
+        <p:spPr>
+          <a:xfrm>
+            <a:off x="1463040" y="2103120"/>
+            <a:ext cx="3657600" cy="457200"/>
+          </a:xfrm>
+          <a:prstGeom prst="rect">
+            <a:avLst/>
+          </a:prstGeom>
+          <a:noFill/>
+        </p:spPr>
+        <p:txBody>
+          <a:bodyPr wrap="square">
+            <a:spAutoFit/>
+          </a:bodyPr>
+          <a:lstStyle/>
+          <a:p>
+            <a:pPr algn="l">
+              <a:defRPr sz="1400" b="1">
+                <a:solidFill>
+                  <a:srgbClr val="0D2339"/>
+                </a:solidFill>
+              </a:defRPr>
+            </a:pPr>
+            <a:r>
+              <a:t>I define the problem</a:t>
+            </a:r>
+          </a:p>
+        </p:txBody>
+      </p:sp>
+      <p:sp>
+        <p:nvSpPr>
+          <p:cNvPr id="6" name="TextBox 5"/>
+          <p:cNvSpPr txBox="1"/>
+          <p:nvPr/>
+        </p:nvSpPr>
+        <p:spPr>
+          <a:xfrm>
+            <a:off x="5303520" y="2103120"/>
+            <a:ext cx="5943600" cy="457200"/>
+          </a:xfrm>
+          <a:prstGeom prst="rect">
+            <a:avLst/>
+          </a:prstGeom>
+          <a:noFill/>
+        </p:spPr>
+        <p:txBody>
+          <a:bodyPr wrap="square">
+            <a:spAutoFit/>
+          </a:bodyPr>
+          <a:lstStyle/>
+          <a:p>
+            <a:pPr algn="l">
+              <a:defRPr sz="1300" b="0">
+                <a:solidFill>
+                  <a:srgbClr val="2B4660"/>
+                </a:solidFill>
+              </a:defRPr>
+            </a:pPr>
+            <a:r>
+              <a:t>PBW in underwriting -- from my own published research</a:t>
+            </a:r>
+          </a:p>
+        </p:txBody>
+      </p:sp>
+      <p:sp>
+        <p:nvSpPr>
+          <p:cNvPr id="7" name="Rectangle 6"/>
+          <p:cNvSpPr/>
+          <p:nvPr/>
+        </p:nvSpPr>
+        <p:spPr>
+          <a:xfrm>
+            <a:off x="731520" y="2971800"/>
+            <a:ext cx="548640" cy="548640"/>
+          </a:xfrm>
+          <a:prstGeom prst="rect">
+            <a:avLst/>
+          </a:prstGeom>
+          <a:solidFill>
+            <a:srgbClr val="0D2339"/>
+          </a:solidFill>
+          <a:ln>
+            <a:noFill/>
+          </a:ln>
+        </p:spPr>
+        <p:style>
+          <a:lnRef idx="1">
+            <a:schemeClr val="accent1"/>
+          </a:lnRef>
+          <a:fillRef idx="3">
+            <a:schemeClr val="accent1"/>
+          </a:fillRef>
+          <a:effectRef idx="2">
+            <a:schemeClr val="accent1"/>
+          </a:effectRef>
+          <a:fontRef idx="minor">
+            <a:schemeClr val="lt1"/>
+          </a:fontRef>
+        </p:style>
+        <p:txBody>
+          <a:bodyPr rtlCol="0" anchor="ctr"/>
+          <a:lstStyle/>
+          <a:p>
+            <a:pPr algn="ctr">
+              <a:defRPr sz="1600" b="1">
+                <a:solidFill>
+                  <a:srgbClr val="FFFFFF"/>
+                </a:solidFill>
+              </a:defRPr>
+            </a:pPr>
+            <a:r>
+              <a:t>2</a:t>
+            </a:r>
+          </a:p>
+        </p:txBody>
+      </p:sp>
+      <p:sp>
+        <p:nvSpPr>
+          <p:cNvPr id="8" name="TextBox 7"/>
+          <p:cNvSpPr txBox="1"/>
+          <p:nvPr/>
+        </p:nvSpPr>
+        <p:spPr>
+          <a:xfrm>
+            <a:off x="1463040" y="2971800"/>
+            <a:ext cx="3657600" cy="457200"/>
+          </a:xfrm>
+          <a:prstGeom prst="rect">
+            <a:avLst/>
+          </a:prstGeom>
+          <a:noFill/>
+        </p:spPr>
+        <p:txBody>
+          <a:bodyPr wrap="square">
+            <a:spAutoFit/>
+          </a:bodyPr>
+          <a:lstStyle/>
+          <a:p>
+            <a:pPr algn="l">
+              <a:defRPr sz="1400" b="1">
+                <a:solidFill>
+                  <a:srgbClr val="0D2339"/>
+                </a:solidFill>
+              </a:defRPr>
+            </a:pPr>
+            <a:r>
+              <a:t>Claude builds the code</a:t>
+            </a:r>
+          </a:p>
+        </p:txBody>
+      </p:sp>
+      <p:sp>
+        <p:nvSpPr>
+          <p:cNvPr id="9" name="TextBox 8"/>
+          <p:cNvSpPr txBox="1"/>
+          <p:nvPr/>
+        </p:nvSpPr>
+        <p:spPr>
+          <a:xfrm>
+            <a:off x="5303520" y="2971800"/>
+            <a:ext cx="5943600" cy="457200"/>
+          </a:xfrm>
+          <a:prstGeom prst="rect">
+            <a:avLst/>
+          </a:prstGeom>
+          <a:noFill/>
+        </p:spPr>
+        <p:txBody>
+          <a:bodyPr wrap="square">
+            <a:spAutoFit/>
+          </a:bodyPr>
+          <a:lstStyle/>
+          <a:p>
+            <a:pPr algn="l">
+              <a:defRPr sz="1300" b="0">
+                <a:solidFill>
+                  <a:srgbClr val="2B4660"/>
+                </a:solidFill>
+              </a:defRPr>
+            </a:pPr>
+            <a:r>
+              <a:t>Pipeline, models, tests, app -- 21,000 lines in 48 hours</a:t>
+            </a:r>
+          </a:p>
+        </p:txBody>
+      </p:sp>
+      <p:sp>
+        <p:nvSpPr>
+          <p:cNvPr id="10" name="Rectangle 9"/>
+          <p:cNvSpPr/>
+          <p:nvPr/>
+        </p:nvSpPr>
+        <p:spPr>
+          <a:xfrm>
+            <a:off x="731520" y="3840479"/>
+            <a:ext cx="548640" cy="548640"/>
+          </a:xfrm>
+          <a:prstGeom prst="rect">
+            <a:avLst/>
+          </a:prstGeom>
+          <a:solidFill>
+            <a:srgbClr val="107ACA"/>
+          </a:solidFill>
+          <a:ln>
+            <a:noFill/>
+          </a:ln>
+        </p:spPr>
+        <p:style>
+          <a:lnRef idx="1">
+            <a:schemeClr val="accent1"/>
+          </a:lnRef>
+          <a:fillRef idx="3">
+            <a:schemeClr val="accent1"/>
+          </a:fillRef>
+          <a:effectRef idx="2">
+            <a:schemeClr val="accent1"/>
+          </a:effectRef>
+          <a:fontRef idx="minor">
+            <a:schemeClr val="lt1"/>
+          </a:fontRef>
+        </p:style>
+        <p:txBody>
+          <a:bodyPr rtlCol="0" anchor="ctr"/>
+          <a:lstStyle/>
+          <a:p>
+            <a:pPr algn="ctr">
+              <a:defRPr sz="1600" b="1">
+                <a:solidFill>
+                  <a:srgbClr val="FFFFFF"/>
+                </a:solidFill>
+              </a:defRPr>
+            </a:pPr>
+            <a:r>
+              <a:t>3</a:t>
+            </a:r>
+          </a:p>
+        </p:txBody>
+      </p:sp>
+      <p:sp>
+        <p:nvSpPr>
+          <p:cNvPr id="11" name="TextBox 10"/>
+          <p:cNvSpPr txBox="1"/>
+          <p:nvPr/>
+        </p:nvSpPr>
+        <p:spPr>
+          <a:xfrm>
+            <a:off x="1463040" y="3840479"/>
+            <a:ext cx="3657600" cy="457200"/>
+          </a:xfrm>
+          <a:prstGeom prst="rect">
+            <a:avLst/>
+          </a:prstGeom>
+          <a:noFill/>
+        </p:spPr>
+        <p:txBody>
+          <a:bodyPr wrap="square">
+            <a:spAutoFit/>
+          </a:bodyPr>
+          <a:lstStyle/>
+          <a:p>
+            <a:pPr algn="l">
+              <a:defRPr sz="1400" b="1">
+                <a:solidFill>
+                  <a:srgbClr val="0D2339"/>
+                </a:solidFill>
+              </a:defRPr>
+            </a:pPr>
+            <a:r>
+              <a:t>I verify the science</a:t>
+            </a:r>
+          </a:p>
+        </p:txBody>
+      </p:sp>
+      <p:sp>
+        <p:nvSpPr>
+          <p:cNvPr id="12" name="TextBox 11"/>
+          <p:cNvSpPr txBox="1"/>
+          <p:nvPr/>
+        </p:nvSpPr>
+        <p:spPr>
+          <a:xfrm>
+            <a:off x="5303520" y="3840479"/>
+            <a:ext cx="5943600" cy="457200"/>
+          </a:xfrm>
+          <a:prstGeom prst="rect">
+            <a:avLst/>
+          </a:prstGeom>
+          <a:noFill/>
+        </p:spPr>
+        <p:txBody>
+          <a:bodyPr wrap="square">
+            <a:spAutoFit/>
+          </a:bodyPr>
+          <a:lstStyle/>
+          <a:p>
+            <a:pPr algn="l">
+              <a:defRPr sz="1300" b="0">
+                <a:solidFill>
+                  <a:srgbClr val="2B4660"/>
+                </a:solidFill>
+              </a:defRPr>
+            </a:pPr>
+            <a:r>
+              <a:t>LLM agents query PubMed -- I validate against domain knowledge</a:t>
+            </a:r>
+          </a:p>
+        </p:txBody>
+      </p:sp>
+      <p:sp>
+        <p:nvSpPr>
+          <p:cNvPr id="13" name="Rectangle 12"/>
+          <p:cNvSpPr/>
+          <p:nvPr/>
+        </p:nvSpPr>
+        <p:spPr>
+          <a:xfrm>
+            <a:off x="731520" y="4709159"/>
+            <a:ext cx="548640" cy="548640"/>
+          </a:xfrm>
+          <a:prstGeom prst="rect">
+            <a:avLst/>
+          </a:prstGeom>
+          <a:solidFill>
+            <a:srgbClr val="0D2339"/>
+          </a:solidFill>
+          <a:ln>
+            <a:noFill/>
+          </a:ln>
+        </p:spPr>
+        <p:style>
+          <a:lnRef idx="1">
+            <a:schemeClr val="accent1"/>
+          </a:lnRef>
+          <a:fillRef idx="3">
+            <a:schemeClr val="accent1"/>
+          </a:fillRef>
+          <a:effectRef idx="2">
+            <a:schemeClr val="accent1"/>
+          </a:effectRef>
+          <a:fontRef idx="minor">
+            <a:schemeClr val="lt1"/>
+          </a:fontRef>
+        </p:style>
+        <p:txBody>
+          <a:bodyPr rtlCol="0" anchor="ctr"/>
+          <a:lstStyle/>
+          <a:p>
+            <a:pPr algn="ctr">
+              <a:defRPr sz="1600" b="1">
+                <a:solidFill>
+                  <a:srgbClr val="FFFFFF"/>
+                </a:solidFill>
+              </a:defRPr>
+            </a:pPr>
+            <a:r>
+              <a:t>4</a:t>
+            </a:r>
+          </a:p>
+        </p:txBody>
+      </p:sp>
+      <p:sp>
+        <p:nvSpPr>
+          <p:cNvPr id="14" name="TextBox 13"/>
+          <p:cNvSpPr txBox="1"/>
+          <p:nvPr/>
+        </p:nvSpPr>
+        <p:spPr>
+          <a:xfrm>
+            <a:off x="1463040" y="4709159"/>
+            <a:ext cx="3657600" cy="457200"/>
+          </a:xfrm>
+          <a:prstGeom prst="rect">
+            <a:avLst/>
+          </a:prstGeom>
+          <a:noFill/>
+        </p:spPr>
+        <p:txBody>
+          <a:bodyPr wrap="square">
+            <a:spAutoFit/>
+          </a:bodyPr>
+          <a:lstStyle/>
+          <a:p>
+            <a:pPr algn="l">
+              <a:defRPr sz="1400" b="1">
+                <a:solidFill>
+                  <a:srgbClr val="0D2339"/>
+                </a:solidFill>
+              </a:defRPr>
+            </a:pPr>
+            <a:r>
+              <a:t>Claude handles scale</a:t>
+            </a:r>
+          </a:p>
+        </p:txBody>
+      </p:sp>
+      <p:sp>
+        <p:nvSpPr>
+          <p:cNvPr id="15" name="TextBox 14"/>
+          <p:cNvSpPr txBox="1"/>
+          <p:nvPr/>
+        </p:nvSpPr>
+        <p:spPr>
+          <a:xfrm>
+            <a:off x="5303520" y="4709159"/>
+            <a:ext cx="5943600" cy="457200"/>
+          </a:xfrm>
+          <a:prstGeom prst="rect">
+            <a:avLst/>
+          </a:prstGeom>
+          <a:noFill/>
+        </p:spPr>
+        <p:txBody>
+          <a:bodyPr wrap="square">
+            <a:spAutoFit/>
+          </a:bodyPr>
+          <a:lstStyle/>
+          <a:p>
+            <a:pPr algn="l">
+              <a:defRPr sz="1300" b="0">
+                <a:solidFill>
+                  <a:srgbClr val="2B4660"/>
+                </a:solidFill>
+              </a:defRPr>
+            </a:pPr>
+            <a:r>
+              <a:t>231 tests, 4 markets, 2 diseases, fact-checked, EU AI Act ready</a:t>
+            </a:r>
+          </a:p>
+        </p:txBody>
+      </p:sp>
+      <p:sp>
+        <p:nvSpPr>
+          <p:cNvPr id="16" name="Rectangle 15"/>
+          <p:cNvSpPr/>
+          <p:nvPr/>
+        </p:nvSpPr>
+        <p:spPr>
+          <a:xfrm>
+            <a:off x="731520" y="5577840"/>
+            <a:ext cx="548640" cy="548640"/>
+          </a:xfrm>
+          <a:prstGeom prst="rect">
+            <a:avLst/>
+          </a:prstGeom>
+          <a:solidFill>
+            <a:srgbClr val="107ACA"/>
+          </a:solidFill>
+          <a:ln>
+            <a:noFill/>
+          </a:ln>
+        </p:spPr>
+        <p:style>
+          <a:lnRef idx="1">
+            <a:schemeClr val="accent1"/>
+          </a:lnRef>
+          <a:fillRef idx="3">
+            <a:schemeClr val="accent1"/>
+          </a:fillRef>
+          <a:effectRef idx="2">
+            <a:schemeClr val="accent1"/>
+          </a:effectRef>
+          <a:fontRef idx="minor">
+            <a:schemeClr val="lt1"/>
+          </a:fontRef>
+        </p:style>
+        <p:txBody>
+          <a:bodyPr rtlCol="0" anchor="ctr"/>
+          <a:lstStyle/>
+          <a:p>
+            <a:pPr algn="ctr">
+              <a:defRPr sz="1600" b="1">
+                <a:solidFill>
+                  <a:srgbClr val="FFFFFF"/>
+                </a:solidFill>
+              </a:defRPr>
+            </a:pPr>
+            <a:r>
+              <a:t>5</a:t>
+            </a:r>
+          </a:p>
+        </p:txBody>
+      </p:sp>
+      <p:sp>
+        <p:nvSpPr>
+          <p:cNvPr id="17" name="TextBox 16"/>
+          <p:cNvSpPr txBox="1"/>
+          <p:nvPr/>
+        </p:nvSpPr>
+        <p:spPr>
+          <a:xfrm>
+            <a:off x="1463040" y="5577840"/>
+            <a:ext cx="3657600" cy="457200"/>
+          </a:xfrm>
+          <a:prstGeom prst="rect">
+            <a:avLst/>
+          </a:prstGeom>
+          <a:noFill/>
+        </p:spPr>
+        <p:txBody>
+          <a:bodyPr wrap="square">
+            <a:spAutoFit/>
+          </a:bodyPr>
+          <a:lstStyle/>
+          <a:p>
+            <a:pPr algn="l">
+              <a:defRPr sz="1400" b="1">
+                <a:solidFill>
+                  <a:srgbClr val="0D2339"/>
+                </a:solidFill>
+              </a:defRPr>
+            </a:pPr>
+            <a:r>
+              <a:t>I make the decisions</a:t>
+            </a:r>
+          </a:p>
+        </p:txBody>
+      </p:sp>
+      <p:sp>
+        <p:nvSpPr>
+          <p:cNvPr id="18" name="TextBox 17"/>
+          <p:cNvSpPr txBox="1"/>
+          <p:nvPr/>
+        </p:nvSpPr>
+        <p:spPr>
+          <a:xfrm>
+            <a:off x="5303520" y="5577840"/>
+            <a:ext cx="5943600" cy="457200"/>
+          </a:xfrm>
+          <a:prstGeom prst="rect">
+            <a:avLst/>
+          </a:prstGeom>
+          <a:noFill/>
+        </p:spPr>
+        <p:txBody>
+          <a:bodyPr wrap="square">
+            <a:spAutoFit/>
+          </a:bodyPr>
+          <a:lstStyle/>
+          <a:p>
+            <a:pPr algn="l">
+              <a:defRPr sz="1300" b="0">
+                <a:solidFill>
+                  <a:srgbClr val="2B4660"/>
+                </a:solidFill>
+              </a:defRPr>
+            </a:pPr>
+            <a:r>
+              <a:t>Architecture, clinical thresholds, what to show, what matters</a:t>
+            </a:r>
+          </a:p>
+        </p:txBody>
+      </p:sp>
     </p:spTree>
   </p:cSld>
   <p:clrMapOvr>
@@ -6725,8 +6434,8 @@
         </p:nvSpPr>
         <p:spPr>
           <a:xfrm>
-            <a:off x="731520" y="457200"/>
-            <a:ext cx="10058400" cy="731520"/>
+            <a:off x="731520" y="365760"/>
+            <a:ext cx="10515600" cy="731520"/>
           </a:xfrm>
           <a:prstGeom prst="rect">
             <a:avLst/>
@@ -6740,28 +6449,280 @@
           <a:lstStyle/>
           <a:p>
             <a:pPr algn="l">
-              <a:defRPr sz="3200" b="1">
+              <a:defRPr sz="2800" b="1">
                 <a:solidFill>
                   <a:srgbClr val="0D2339"/>
                 </a:solidFill>
               </a:defRPr>
             </a:pPr>
             <a:r>
-              <a:t>Disease Progression: Alzheimer's</a:t>
-            </a:r>
-          </a:p>
-        </p:txBody>
-      </p:sp>
-      <p:sp>
-        <p:nvSpPr>
-          <p:cNvPr id="3" name="TextBox 2"/>
+              <a:t>In 90 days I'd deliver calibrated PBW detection on real Allianz data</a:t>
+            </a:r>
+          </a:p>
+        </p:txBody>
+      </p:sp>
+      <p:sp>
+        <p:nvSpPr>
+          <p:cNvPr id="3" name="Rectangle 2"/>
+          <p:cNvSpPr/>
+          <p:nvPr/>
+        </p:nvSpPr>
+        <p:spPr>
+          <a:xfrm>
+            <a:off x="731520" y="1554480"/>
+            <a:ext cx="3291840" cy="3200400"/>
+          </a:xfrm>
+          <a:prstGeom prst="rect">
+            <a:avLst/>
+          </a:prstGeom>
+          <a:solidFill>
+            <a:srgbClr val="E7F4FD"/>
+          </a:solidFill>
+          <a:ln>
+            <a:solidFill>
+              <a:srgbClr val="C4CDD6"/>
+            </a:solidFill>
+          </a:ln>
+        </p:spPr>
+        <p:style>
+          <a:lnRef idx="1">
+            <a:schemeClr val="accent1"/>
+          </a:lnRef>
+          <a:fillRef idx="3">
+            <a:schemeClr val="accent1"/>
+          </a:fillRef>
+          <a:effectRef idx="2">
+            <a:schemeClr val="accent1"/>
+          </a:effectRef>
+          <a:fontRef idx="minor">
+            <a:schemeClr val="lt1"/>
+          </a:fontRef>
+        </p:style>
+        <p:txBody>
+          <a:bodyPr rtlCol="0" anchor="ctr" wrap="square"/>
+          <a:lstStyle/>
+          <a:p>
+            <a:pPr algn="ctr">
+              <a:defRPr sz="1100" b="1">
+                <a:solidFill>
+                  <a:srgbClr val="107ACA"/>
+                </a:solidFill>
+              </a:defRPr>
+            </a:pPr>
+            <a:r>
+              <a:t>Month 1</a:t>
+            </a:r>
+          </a:p>
+          <a:p>
+            <a:pPr>
+              <a:spcBef>
+                <a:spcPts val="600"/>
+              </a:spcBef>
+              <a:defRPr sz="1800" b="1">
+                <a:solidFill>
+                  <a:srgbClr val="0D2339"/>
+                </a:solidFill>
+              </a:defRPr>
+            </a:pPr>
+            <a:r>
+              <a:t>Audit &amp; Map</a:t>
+            </a:r>
+          </a:p>
+          <a:p>
+            <a:pPr>
+              <a:spcBef>
+                <a:spcPts val="1000"/>
+              </a:spcBef>
+              <a:defRPr sz="1100">
+                <a:solidFill>
+                  <a:srgbClr val="2B4660"/>
+                </a:solidFill>
+              </a:defRPr>
+            </a:pPr>
+            <a:r>
+              <a:t>Audit current underwriting pipeline for PBW risk. Map data quality across Allianz markets. Identify the 3 highest-impact failure modes.</a:t>
+            </a:r>
+          </a:p>
+        </p:txBody>
+      </p:sp>
+      <p:sp>
+        <p:nvSpPr>
+          <p:cNvPr id="4" name="Rectangle 3"/>
+          <p:cNvSpPr/>
+          <p:nvPr/>
+        </p:nvSpPr>
+        <p:spPr>
+          <a:xfrm>
+            <a:off x="4389120" y="1554480"/>
+            <a:ext cx="3291840" cy="3200400"/>
+          </a:xfrm>
+          <a:prstGeom prst="rect">
+            <a:avLst/>
+          </a:prstGeom>
+          <a:solidFill>
+            <a:srgbClr val="E7F4FD"/>
+          </a:solidFill>
+          <a:ln>
+            <a:solidFill>
+              <a:srgbClr val="C4CDD6"/>
+            </a:solidFill>
+          </a:ln>
+        </p:spPr>
+        <p:style>
+          <a:lnRef idx="1">
+            <a:schemeClr val="accent1"/>
+          </a:lnRef>
+          <a:fillRef idx="3">
+            <a:schemeClr val="accent1"/>
+          </a:fillRef>
+          <a:effectRef idx="2">
+            <a:schemeClr val="accent1"/>
+          </a:effectRef>
+          <a:fontRef idx="minor">
+            <a:schemeClr val="lt1"/>
+          </a:fontRef>
+        </p:style>
+        <p:txBody>
+          <a:bodyPr rtlCol="0" anchor="ctr" wrap="square"/>
+          <a:lstStyle/>
+          <a:p>
+            <a:pPr algn="ctr">
+              <a:defRPr sz="1100" b="1">
+                <a:solidFill>
+                  <a:srgbClr val="107ACA"/>
+                </a:solidFill>
+              </a:defRPr>
+            </a:pPr>
+            <a:r>
+              <a:t>Month 2</a:t>
+            </a:r>
+          </a:p>
+          <a:p>
+            <a:pPr>
+              <a:spcBef>
+                <a:spcPts val="600"/>
+              </a:spcBef>
+              <a:defRPr sz="1800" b="1">
+                <a:solidFill>
+                  <a:srgbClr val="0D2339"/>
+                </a:solidFill>
+              </a:defRPr>
+            </a:pPr>
+            <a:r>
+              <a:t>Calibrate &amp; Train</a:t>
+            </a:r>
+          </a:p>
+          <a:p>
+            <a:pPr>
+              <a:spcBef>
+                <a:spcPts val="1000"/>
+              </a:spcBef>
+              <a:defRPr sz="1100">
+                <a:solidFill>
+                  <a:srgbClr val="2B4660"/>
+                </a:solidFill>
+              </a:defRPr>
+            </a:pPr>
+            <a:r>
+              <a:t>Calibrate DQS on real Allianz data. Retrain model router on actual data profiles. Deliver first real-data PBW prevalence estimate by market.</a:t>
+            </a:r>
+          </a:p>
+        </p:txBody>
+      </p:sp>
+      <p:sp>
+        <p:nvSpPr>
+          <p:cNvPr id="5" name="Rectangle 4"/>
+          <p:cNvSpPr/>
+          <p:nvPr/>
+        </p:nvSpPr>
+        <p:spPr>
+          <a:xfrm>
+            <a:off x="8046720" y="1554480"/>
+            <a:ext cx="3291840" cy="3200400"/>
+          </a:xfrm>
+          <a:prstGeom prst="rect">
+            <a:avLst/>
+          </a:prstGeom>
+          <a:solidFill>
+            <a:srgbClr val="E7F4FD"/>
+          </a:solidFill>
+          <a:ln>
+            <a:solidFill>
+              <a:srgbClr val="C4CDD6"/>
+            </a:solidFill>
+          </a:ln>
+        </p:spPr>
+        <p:style>
+          <a:lnRef idx="1">
+            <a:schemeClr val="accent1"/>
+          </a:lnRef>
+          <a:fillRef idx="3">
+            <a:schemeClr val="accent1"/>
+          </a:fillRef>
+          <a:effectRef idx="2">
+            <a:schemeClr val="accent1"/>
+          </a:effectRef>
+          <a:fontRef idx="minor">
+            <a:schemeClr val="lt1"/>
+          </a:fontRef>
+        </p:style>
+        <p:txBody>
+          <a:bodyPr rtlCol="0" anchor="ctr" wrap="square"/>
+          <a:lstStyle/>
+          <a:p>
+            <a:pPr algn="ctr">
+              <a:defRPr sz="1100" b="1">
+                <a:solidFill>
+                  <a:srgbClr val="107ACA"/>
+                </a:solidFill>
+              </a:defRPr>
+            </a:pPr>
+            <a:r>
+              <a:t>Month 3</a:t>
+            </a:r>
+          </a:p>
+          <a:p>
+            <a:pPr>
+              <a:spcBef>
+                <a:spcPts val="600"/>
+              </a:spcBef>
+              <a:defRPr sz="1800" b="1">
+                <a:solidFill>
+                  <a:srgbClr val="0D2339"/>
+                </a:solidFill>
+              </a:defRPr>
+            </a:pPr>
+            <a:r>
+              <a:t>Ship &amp; Document</a:t>
+            </a:r>
+          </a:p>
+          <a:p>
+            <a:pPr>
+              <a:spcBef>
+                <a:spcPts val="1000"/>
+              </a:spcBef>
+              <a:defRPr sz="1100">
+                <a:solidFill>
+                  <a:srgbClr val="2B4660"/>
+                </a:solidFill>
+              </a:defRPr>
+            </a:pPr>
+            <a:r>
+              <a:t>Production prototype: REST API for per-case quality scoring. Validated PBW detection rates. EU AI Act compliance documentation.</a:t>
+            </a:r>
+          </a:p>
+        </p:txBody>
+      </p:sp>
+      <p:sp>
+        <p:nvSpPr>
+          <p:cNvPr id="6" name="TextBox 5"/>
           <p:cNvSpPr txBox="1"/>
           <p:nvPr/>
         </p:nvSpPr>
         <p:spPr>
           <a:xfrm>
-            <a:off x="731520" y="1280160"/>
-            <a:ext cx="10058400" cy="457200"/>
+            <a:off x="731520" y="5303520"/>
+            <a:ext cx="10515600" cy="457200"/>
           </a:xfrm>
           <a:prstGeom prst="rect">
             <a:avLst/>
@@ -6774,43 +6735,19 @@
           </a:bodyPr>
           <a:lstStyle/>
           <a:p>
-            <a:pPr algn="l">
-              <a:defRPr sz="1400" b="0">
-                <a:solidFill>
-                  <a:srgbClr val="2B4660"/>
-                </a:solidFill>
-              </a:defRPr>
-            </a:pPr>
-            <a:r>
-              <a:t>7-state CTMC: NC --&gt; SCD --&gt; MCI --&gt; Mild AD --&gt; Moderate AD --&gt; Severe AD --&gt; Death</a:t>
-            </a:r>
-          </a:p>
-        </p:txBody>
-      </p:sp>
-      <p:pic>
-        <p:nvPicPr>
-          <p:cNvPr id="4" name="Picture 3" descr="tmpjpxcdo0q.png"/>
-          <p:cNvPicPr>
-            <a:picLocks noChangeAspect="1"/>
-          </p:cNvPicPr>
-          <p:nvPr/>
-        </p:nvPicPr>
-        <p:blipFill>
-          <a:blip r:embed="rId2"/>
-          <a:stretch>
-            <a:fillRect/>
-          </a:stretch>
-        </p:blipFill>
-        <p:spPr>
-          <a:xfrm>
-            <a:off x="1371600" y="2011680"/>
-            <a:ext cx="9144000" cy="4114800"/>
-          </a:xfrm>
-          <a:prstGeom prst="rect">
-            <a:avLst/>
-          </a:prstGeom>
-        </p:spPr>
-      </p:pic>
+            <a:pPr algn="ctr">
+              <a:defRPr sz="1400" b="1">
+                <a:solidFill>
+                  <a:srgbClr val="107ACA"/>
+                </a:solidFill>
+              </a:defRPr>
+            </a:pPr>
+            <a:r>
+              <a:t>I built this proof of concept in 48 hours. Imagine what I do with real data and 90 days.</a:t>
+            </a:r>
+          </a:p>
+        </p:txBody>
+      </p:sp>
     </p:spTree>
   </p:cSld>
   <p:clrMapOvr>
